--- a/CKDSurveillance/PPT/Q818.pptx
+++ b/CKDSurveillance/PPT/Q818.pptx
@@ -1249,9 +1249,9 @@
           <c:invertIfNegative val="0"/>
           <c:cat>
             <c:strRef>
-              <c:f>PKDPeriodPrevAge!$E$35:$M$35</c:f>
+              <c:f>PKDPeriodPrevAge!$E$35:$N$35</c:f>
               <c:strCache>
-                <c:ptCount val="9"/>
+                <c:ptCount val="10"/>
                 <c:pt idx="0">
                   <c:v>0-5</c:v>
                 </c:pt>
@@ -1278,16 +1278,19 @@
                 </c:pt>
                 <c:pt idx="8">
                   <c:v>70+</c:v>
+                </c:pt>
+                <c:pt idx="9">
+                  <c:v>Overall</c:v>
                 </c:pt>
               </c:strCache>
             </c:strRef>
           </c:cat>
           <c:val>
             <c:numRef>
-              <c:f>PKDPeriodPrevAge!$E$36:$M$36</c:f>
+              <c:f>PKDPeriodPrevAge!$E$36:$N$36</c:f>
               <c:numCache>
                 <c:formatCode>General</c:formatCode>
-                <c:ptCount val="9"/>
+                <c:ptCount val="10"/>
                 <c:pt idx="0">
                   <c:v>20.49</c:v>
                 </c:pt>
@@ -1314,13 +1317,16 @@
                 </c:pt>
                 <c:pt idx="8">
                   <c:v>142.94</c:v>
+                </c:pt>
+                <c:pt idx="9">
+                  <c:v>58.21</c:v>
                 </c:pt>
               </c:numCache>
             </c:numRef>
           </c:val>
           <c:extLst>
             <c:ext xmlns:c16="http://schemas.microsoft.com/office/drawing/2014/chart" uri="{C3380CC4-5D6E-409C-BE32-E72D297353CC}">
-              <c16:uniqueId val="{00000000-FD1F-4EE8-9651-052809BEF0C9}"/>
+              <c16:uniqueId val="{00000000-9469-43FE-BB2C-D9FF02D92371}"/>
             </c:ext>
           </c:extLst>
         </c:ser>
@@ -1350,9 +1356,9 @@
           <c:invertIfNegative val="0"/>
           <c:cat>
             <c:strRef>
-              <c:f>PKDPeriodPrevAge!$E$35:$M$35</c:f>
+              <c:f>PKDPeriodPrevAge!$E$35:$N$35</c:f>
               <c:strCache>
-                <c:ptCount val="9"/>
+                <c:ptCount val="10"/>
                 <c:pt idx="0">
                   <c:v>0-5</c:v>
                 </c:pt>
@@ -1379,16 +1385,19 @@
                 </c:pt>
                 <c:pt idx="8">
                   <c:v>70+</c:v>
+                </c:pt>
+                <c:pt idx="9">
+                  <c:v>Overall</c:v>
                 </c:pt>
               </c:strCache>
             </c:strRef>
           </c:cat>
           <c:val>
             <c:numRef>
-              <c:f>PKDPeriodPrevAge!$E$37:$M$37</c:f>
+              <c:f>PKDPeriodPrevAge!$E$37:$N$37</c:f>
               <c:numCache>
                 <c:formatCode>General</c:formatCode>
-                <c:ptCount val="9"/>
+                <c:ptCount val="10"/>
                 <c:pt idx="0">
                   <c:v>20.78</c:v>
                 </c:pt>
@@ -1415,13 +1424,16 @@
                 </c:pt>
                 <c:pt idx="8">
                   <c:v>132.25</c:v>
+                </c:pt>
+                <c:pt idx="9">
+                  <c:v>54.23</c:v>
                 </c:pt>
               </c:numCache>
             </c:numRef>
           </c:val>
           <c:extLst>
             <c:ext xmlns:c16="http://schemas.microsoft.com/office/drawing/2014/chart" uri="{C3380CC4-5D6E-409C-BE32-E72D297353CC}">
-              <c16:uniqueId val="{00000001-FD1F-4EE8-9651-052809BEF0C9}"/>
+              <c16:uniqueId val="{00000001-9469-43FE-BB2C-D9FF02D92371}"/>
             </c:ext>
           </c:extLst>
         </c:ser>
@@ -1452,7 +1464,7 @@
               <a:lstStyle/>
               <a:p>
                 <a:pPr>
-                  <a:defRPr sz="2400" b="0" i="0" u="none" strike="noStrike" kern="1200" baseline="0">
+                  <a:defRPr sz="2000" b="0" i="0" u="none" strike="noStrike" kern="1200" baseline="0">
                     <a:solidFill>
                       <a:schemeClr val="tx1"/>
                     </a:solidFill>
@@ -1481,7 +1493,7 @@
             <a:lstStyle/>
             <a:p>
               <a:pPr>
-                <a:defRPr sz="2400" b="0" i="0" u="none" strike="noStrike" kern="1200" baseline="0">
+                <a:defRPr sz="2000" b="0" i="0" u="none" strike="noStrike" kern="1200" baseline="0">
                   <a:solidFill>
                     <a:schemeClr val="tx1"/>
                   </a:solidFill>
@@ -1516,7 +1528,7 @@
           <a:lstStyle/>
           <a:p>
             <a:pPr>
-              <a:defRPr sz="2400" b="0" i="0" u="none" strike="noStrike" kern="1200" baseline="0">
+              <a:defRPr sz="2000" b="0" i="0" u="none" strike="noStrike" kern="1200" baseline="0">
                 <a:solidFill>
                   <a:schemeClr val="tx1"/>
                 </a:solidFill>
@@ -1563,7 +1575,7 @@
               <a:lstStyle/>
               <a:p>
                 <a:pPr>
-                  <a:defRPr sz="2400" b="0" i="0" u="none" strike="noStrike" kern="1200" baseline="0">
+                  <a:defRPr sz="2000" b="0" i="0" u="none" strike="noStrike" kern="1200" baseline="0">
                     <a:solidFill>
                       <a:schemeClr val="tx1"/>
                     </a:solidFill>
@@ -1592,7 +1604,7 @@
             <a:lstStyle/>
             <a:p>
               <a:pPr>
-                <a:defRPr sz="2400" b="0" i="0" u="none" strike="noStrike" kern="1200" baseline="0">
+                <a:defRPr sz="2000" b="0" i="0" u="none" strike="noStrike" kern="1200" baseline="0">
                   <a:solidFill>
                     <a:schemeClr val="tx1"/>
                   </a:solidFill>
@@ -1621,7 +1633,7 @@
           <a:lstStyle/>
           <a:p>
             <a:pPr>
-              <a:defRPr sz="2400" b="0" i="0" u="none" strike="noStrike" kern="1200" baseline="0">
+              <a:defRPr sz="2000" b="0" i="0" u="none" strike="noStrike" kern="1200" baseline="0">
                 <a:solidFill>
                   <a:schemeClr val="tx1"/>
                 </a:solidFill>
@@ -1660,7 +1672,7 @@
         <a:lstStyle/>
         <a:p>
           <a:pPr>
-            <a:defRPr sz="2400" b="0" i="0" u="none" strike="noStrike" kern="1200" baseline="0">
+            <a:defRPr sz="2000" b="0" i="0" u="none" strike="noStrike" kern="1200" baseline="0">
               <a:solidFill>
                 <a:schemeClr val="tx1"/>
               </a:solidFill>
@@ -1675,7 +1687,6 @@
     </c:legend>
     <c:plotVisOnly val="1"/>
     <c:dispBlanksAs val="gap"/>
-    <c:showDLblsOverMax val="0"/>
     <c:extLst>
       <c:ext xmlns:c16r3="http://schemas.microsoft.com/office/drawing/2017/03/chart" uri="{56B9EC1D-385E-4148-901F-78D8002777C0}">
         <c16r3:dataDisplayOptions16>
@@ -1683,6 +1694,7 @@
         </c16r3:dataDisplayOptions16>
       </c:ext>
     </c:extLst>
+    <c:showDLblsOverMax val="0"/>
   </c:chart>
   <c:spPr>
     <a:noFill/>
@@ -1696,7 +1708,7 @@
     <a:lstStyle/>
     <a:p>
       <a:pPr>
-        <a:defRPr sz="2400">
+        <a:defRPr sz="2000">
           <a:solidFill>
             <a:schemeClr val="tx1"/>
           </a:solidFill>
@@ -1761,36 +1773,42 @@
           <c:invertIfNegative val="0"/>
           <c:cat>
             <c:strRef>
-              <c:f>PKDPeriodPrevSex!$AM$30:$AM$31</c:f>
+              <c:f>PKDPeriodPrevSex!$AM$30:$AM$32</c:f>
               <c:strCache>
-                <c:ptCount val="2"/>
+                <c:ptCount val="3"/>
                 <c:pt idx="0">
                   <c:v>Female</c:v>
                 </c:pt>
                 <c:pt idx="1">
                   <c:v>Male</c:v>
+                </c:pt>
+                <c:pt idx="2">
+                  <c:v>Overall</c:v>
                 </c:pt>
               </c:strCache>
             </c:strRef>
           </c:cat>
           <c:val>
             <c:numRef>
-              <c:f>PKDPeriodPrevSex!$AN$30:$AN$31</c:f>
+              <c:f>PKDPeriodPrevSex!$AN$30:$AN$32</c:f>
               <c:numCache>
                 <c:formatCode>General</c:formatCode>
-                <c:ptCount val="2"/>
+                <c:ptCount val="3"/>
                 <c:pt idx="0">
                   <c:v>64.14</c:v>
                 </c:pt>
                 <c:pt idx="1">
                   <c:v>61.95</c:v>
+                </c:pt>
+                <c:pt idx="2">
+                  <c:v>58.21</c:v>
                 </c:pt>
               </c:numCache>
             </c:numRef>
           </c:val>
           <c:extLst>
             <c:ext xmlns:c16="http://schemas.microsoft.com/office/drawing/2014/chart" uri="{C3380CC4-5D6E-409C-BE32-E72D297353CC}">
-              <c16:uniqueId val="{00000000-429E-4056-91D6-2DD167835FFC}"/>
+              <c16:uniqueId val="{00000000-6BED-4F45-A4ED-C1B2D5223CB3}"/>
             </c:ext>
           </c:extLst>
         </c:ser>
@@ -1822,36 +1840,42 @@
           <c:invertIfNegative val="0"/>
           <c:cat>
             <c:strRef>
-              <c:f>PKDPeriodPrevSex!$AM$30:$AM$31</c:f>
+              <c:f>PKDPeriodPrevSex!$AM$30:$AM$32</c:f>
               <c:strCache>
-                <c:ptCount val="2"/>
+                <c:ptCount val="3"/>
                 <c:pt idx="0">
                   <c:v>Female</c:v>
                 </c:pt>
                 <c:pt idx="1">
                   <c:v>Male</c:v>
+                </c:pt>
+                <c:pt idx="2">
+                  <c:v>Overall</c:v>
                 </c:pt>
               </c:strCache>
             </c:strRef>
           </c:cat>
           <c:val>
             <c:numRef>
-              <c:f>PKDPeriodPrevSex!$AO$30:$AO$31</c:f>
+              <c:f>PKDPeriodPrevSex!$AO$30:$AO$32</c:f>
               <c:numCache>
                 <c:formatCode>General</c:formatCode>
-                <c:ptCount val="2"/>
+                <c:ptCount val="3"/>
                 <c:pt idx="0">
                   <c:v>53.05</c:v>
                 </c:pt>
                 <c:pt idx="1">
                   <c:v>47.73</c:v>
+                </c:pt>
+                <c:pt idx="2">
+                  <c:v>54.23</c:v>
                 </c:pt>
               </c:numCache>
             </c:numRef>
           </c:val>
           <c:extLst>
             <c:ext xmlns:c16="http://schemas.microsoft.com/office/drawing/2014/chart" uri="{C3380CC4-5D6E-409C-BE32-E72D297353CC}">
-              <c16:uniqueId val="{00000001-429E-4056-91D6-2DD167835FFC}"/>
+              <c16:uniqueId val="{00000001-6BED-4F45-A4ED-C1B2D5223CB3}"/>
             </c:ext>
           </c:extLst>
         </c:ser>
@@ -1898,7 +1922,7 @@
           <a:lstStyle/>
           <a:p>
             <a:pPr>
-              <a:defRPr sz="2400" b="0" i="0" u="none" strike="noStrike" kern="1200" baseline="0">
+              <a:defRPr sz="2000" b="0" i="0" u="none" strike="noStrike" kern="1200" baseline="0">
                 <a:solidFill>
                   <a:schemeClr val="tx1"/>
                 </a:solidFill>
@@ -1947,7 +1971,7 @@
               <a:lstStyle/>
               <a:p>
                 <a:pPr>
-                  <a:defRPr sz="2400" b="0" i="0" u="none" strike="noStrike" kern="1200" baseline="0">
+                  <a:defRPr sz="2000" b="0" i="0" u="none" strike="noStrike" kern="1200" baseline="0">
                     <a:solidFill>
                       <a:schemeClr val="tx1"/>
                     </a:solidFill>
@@ -1958,801 +1982,6 @@
                 </a:pPr>
                 <a:r>
                   <a:rPr lang="en-US"/>
-                  <a:t>PKD Prevalence per 100,000</a:t>
-                </a:r>
-              </a:p>
-            </c:rich>
-          </c:tx>
-          <c:overlay val="0"/>
-          <c:spPr>
-            <a:noFill/>
-            <a:ln>
-              <a:noFill/>
-            </a:ln>
-            <a:effectLst/>
-          </c:spPr>
-          <c:txPr>
-            <a:bodyPr rot="-5400000" spcFirstLastPara="1" vertOverflow="ellipsis" vert="horz" wrap="square" anchor="ctr" anchorCtr="1"/>
-            <a:lstStyle/>
-            <a:p>
-              <a:pPr>
-                <a:defRPr sz="2400" b="0" i="0" u="none" strike="noStrike" kern="1200" baseline="0">
-                  <a:solidFill>
-                    <a:schemeClr val="tx1"/>
-                  </a:solidFill>
-                  <a:latin typeface="+mn-lt"/>
-                  <a:ea typeface="+mn-ea"/>
-                  <a:cs typeface="+mn-cs"/>
-                </a:defRPr>
-              </a:pPr>
-              <a:endParaRPr lang="en-US"/>
-            </a:p>
-          </c:txPr>
-        </c:title>
-        <c:numFmt formatCode="General" sourceLinked="1"/>
-        <c:majorTickMark val="none"/>
-        <c:minorTickMark val="none"/>
-        <c:tickLblPos val="nextTo"/>
-        <c:spPr>
-          <a:noFill/>
-          <a:ln>
-            <a:noFill/>
-          </a:ln>
-          <a:effectLst/>
-        </c:spPr>
-        <c:txPr>
-          <a:bodyPr rot="-60000000" spcFirstLastPara="1" vertOverflow="ellipsis" vert="horz" wrap="square" anchor="ctr" anchorCtr="1"/>
-          <a:lstStyle/>
-          <a:p>
-            <a:pPr>
-              <a:defRPr sz="2400" b="0" i="0" u="none" strike="noStrike" kern="1200" baseline="0">
-                <a:solidFill>
-                  <a:schemeClr val="tx1"/>
-                </a:solidFill>
-                <a:latin typeface="+mn-lt"/>
-                <a:ea typeface="+mn-ea"/>
-                <a:cs typeface="+mn-cs"/>
-              </a:defRPr>
-            </a:pPr>
-            <a:endParaRPr lang="en-US"/>
-          </a:p>
-        </c:txPr>
-        <c:crossAx val="1785061167"/>
-        <c:crosses val="autoZero"/>
-        <c:crossBetween val="between"/>
-      </c:valAx>
-      <c:spPr>
-        <a:noFill/>
-        <a:ln>
-          <a:noFill/>
-        </a:ln>
-        <a:effectLst/>
-      </c:spPr>
-    </c:plotArea>
-    <c:legend>
-      <c:legendPos val="b"/>
-      <c:overlay val="0"/>
-      <c:spPr>
-        <a:noFill/>
-        <a:ln>
-          <a:noFill/>
-        </a:ln>
-        <a:effectLst/>
-      </c:spPr>
-      <c:txPr>
-        <a:bodyPr rot="0" spcFirstLastPara="1" vertOverflow="ellipsis" vert="horz" wrap="square" anchor="ctr" anchorCtr="1"/>
-        <a:lstStyle/>
-        <a:p>
-          <a:pPr>
-            <a:defRPr sz="2400" b="0" i="0" u="none" strike="noStrike" kern="1200" baseline="0">
-              <a:solidFill>
-                <a:schemeClr val="tx1"/>
-              </a:solidFill>
-              <a:latin typeface="+mn-lt"/>
-              <a:ea typeface="+mn-ea"/>
-              <a:cs typeface="+mn-cs"/>
-            </a:defRPr>
-          </a:pPr>
-          <a:endParaRPr lang="en-US"/>
-        </a:p>
-      </c:txPr>
-    </c:legend>
-    <c:plotVisOnly val="1"/>
-    <c:dispBlanksAs val="gap"/>
-    <c:showDLblsOverMax val="0"/>
-  </c:chart>
-  <c:spPr>
-    <a:noFill/>
-    <a:ln>
-      <a:noFill/>
-    </a:ln>
-    <a:effectLst/>
-  </c:spPr>
-  <c:txPr>
-    <a:bodyPr/>
-    <a:lstStyle/>
-    <a:p>
-      <a:pPr>
-        <a:defRPr sz="2400" b="0">
-          <a:solidFill>
-            <a:schemeClr val="tx1"/>
-          </a:solidFill>
-        </a:defRPr>
-      </a:pPr>
-      <a:endParaRPr lang="en-US"/>
-    </a:p>
-  </c:txPr>
-  <c:externalData r:id="rId4">
-    <c:autoUpdate val="0"/>
-  </c:externalData>
-</c:chartSpace>
-</file>
-
-<file path=ppt/charts/chart5.xml><?xml version="1.0" encoding="utf-8"?>
-<c:chartSpace xmlns:c="http://schemas.openxmlformats.org/drawingml/2006/chart" xmlns:a="http://schemas.openxmlformats.org/drawingml/2006/main" xmlns:r="http://schemas.openxmlformats.org/officeDocument/2006/relationships" xmlns:c16r2="http://schemas.microsoft.com/office/drawing/2015/06/chart">
-  <c:date1904 val="0"/>
-  <c:lang val="en-US"/>
-  <c:roundedCorners val="0"/>
-  <mc:AlternateContent xmlns:mc="http://schemas.openxmlformats.org/markup-compatibility/2006">
-    <mc:Choice xmlns:c14="http://schemas.microsoft.com/office/drawing/2007/8/2/chart" Requires="c14">
-      <c14:style val="102"/>
-    </mc:Choice>
-    <mc:Fallback>
-      <c:style val="2"/>
-    </mc:Fallback>
-  </mc:AlternateContent>
-  <c:clrMapOvr bg1="lt1" tx1="dk1" bg2="lt2" tx2="dk2" accent1="accent1" accent2="accent2" accent3="accent3" accent4="accent4" accent5="accent5" accent6="accent6" hlink="hlink" folHlink="folHlink"/>
-  <c:chart>
-    <c:autoTitleDeleted val="1"/>
-    <c:plotArea>
-      <c:layout/>
-      <c:barChart>
-        <c:barDir val="col"/>
-        <c:grouping val="clustered"/>
-        <c:varyColors val="0"/>
-        <c:ser>
-          <c:idx val="9"/>
-          <c:order val="0"/>
-          <c:tx>
-            <c:strRef>
-              <c:f>PKDPeriodPrevSex!$AN$29</c:f>
-              <c:strCache>
-                <c:ptCount val="1"/>
-                <c:pt idx="0">
-                  <c:v>2016-2018</c:v>
-                </c:pt>
-              </c:strCache>
-            </c:strRef>
-          </c:tx>
-          <c:spPr>
-            <a:solidFill>
-              <a:schemeClr val="accent4">
-                <a:lumMod val="60000"/>
-              </a:schemeClr>
-            </a:solidFill>
-            <a:ln>
-              <a:noFill/>
-            </a:ln>
-            <a:effectLst/>
-          </c:spPr>
-          <c:invertIfNegative val="0"/>
-          <c:cat>
-            <c:strRef>
-              <c:f>PKDPeriodPrevSex!$AM$38:$AM$39</c:f>
-              <c:strCache>
-                <c:ptCount val="2"/>
-                <c:pt idx="0">
-                  <c:v>Female</c:v>
-                </c:pt>
-                <c:pt idx="1">
-                  <c:v>Male</c:v>
-                </c:pt>
-              </c:strCache>
-            </c:strRef>
-          </c:cat>
-          <c:val>
-            <c:numRef>
-              <c:f>PKDPeriodPrevSex!$AN$38:$AN$39</c:f>
-              <c:numCache>
-                <c:formatCode>General</c:formatCode>
-                <c:ptCount val="2"/>
-                <c:pt idx="0">
-                  <c:v>87.5</c:v>
-                </c:pt>
-                <c:pt idx="1">
-                  <c:v>90.7</c:v>
-                </c:pt>
-              </c:numCache>
-            </c:numRef>
-          </c:val>
-          <c:extLst>
-            <c:ext xmlns:c16="http://schemas.microsoft.com/office/drawing/2014/chart" uri="{C3380CC4-5D6E-409C-BE32-E72D297353CC}">
-              <c16:uniqueId val="{00000000-07BB-4517-9274-116CBBD50515}"/>
-            </c:ext>
-          </c:extLst>
-        </c:ser>
-        <c:ser>
-          <c:idx val="10"/>
-          <c:order val="1"/>
-          <c:tx>
-            <c:strRef>
-              <c:f>PKDPeriodPrevSex!$AO$29</c:f>
-              <c:strCache>
-                <c:ptCount val="1"/>
-                <c:pt idx="0">
-                  <c:v>2019-2021</c:v>
-                </c:pt>
-              </c:strCache>
-            </c:strRef>
-          </c:tx>
-          <c:spPr>
-            <a:solidFill>
-              <a:schemeClr val="accent5">
-                <a:lumMod val="60000"/>
-              </a:schemeClr>
-            </a:solidFill>
-            <a:ln>
-              <a:noFill/>
-            </a:ln>
-            <a:effectLst/>
-          </c:spPr>
-          <c:invertIfNegative val="0"/>
-          <c:cat>
-            <c:strRef>
-              <c:f>PKDPeriodPrevSex!$AM$38:$AM$39</c:f>
-              <c:strCache>
-                <c:ptCount val="2"/>
-                <c:pt idx="0">
-                  <c:v>Female</c:v>
-                </c:pt>
-                <c:pt idx="1">
-                  <c:v>Male</c:v>
-                </c:pt>
-              </c:strCache>
-            </c:strRef>
-          </c:cat>
-          <c:val>
-            <c:numRef>
-              <c:f>PKDPeriodPrevSex!$AO$38:$AO$39</c:f>
-              <c:numCache>
-                <c:formatCode>General</c:formatCode>
-                <c:ptCount val="2"/>
-                <c:pt idx="0">
-                  <c:v>85</c:v>
-                </c:pt>
-                <c:pt idx="1">
-                  <c:v>83.4</c:v>
-                </c:pt>
-              </c:numCache>
-            </c:numRef>
-          </c:val>
-          <c:extLst>
-            <c:ext xmlns:c16="http://schemas.microsoft.com/office/drawing/2014/chart" uri="{C3380CC4-5D6E-409C-BE32-E72D297353CC}">
-              <c16:uniqueId val="{00000001-07BB-4517-9274-116CBBD50515}"/>
-            </c:ext>
-          </c:extLst>
-        </c:ser>
-        <c:dLbls>
-          <c:showLegendKey val="0"/>
-          <c:showVal val="0"/>
-          <c:showCatName val="0"/>
-          <c:showSerName val="0"/>
-          <c:showPercent val="0"/>
-          <c:showBubbleSize val="0"/>
-        </c:dLbls>
-        <c:gapWidth val="150"/>
-        <c:overlap val="-12"/>
-        <c:axId val="1785061167"/>
-        <c:axId val="1785060687"/>
-        <c:extLst/>
-      </c:barChart>
-      <c:catAx>
-        <c:axId val="1785061167"/>
-        <c:scaling>
-          <c:orientation val="minMax"/>
-        </c:scaling>
-        <c:delete val="0"/>
-        <c:axPos val="b"/>
-        <c:numFmt formatCode="General" sourceLinked="1"/>
-        <c:majorTickMark val="none"/>
-        <c:minorTickMark val="none"/>
-        <c:tickLblPos val="nextTo"/>
-        <c:spPr>
-          <a:noFill/>
-          <a:ln w="9525" cap="flat" cmpd="sng" algn="ctr">
-            <a:solidFill>
-              <a:schemeClr val="tx1">
-                <a:lumMod val="15000"/>
-                <a:lumOff val="85000"/>
-              </a:schemeClr>
-            </a:solidFill>
-            <a:round/>
-          </a:ln>
-          <a:effectLst/>
-        </c:spPr>
-        <c:txPr>
-          <a:bodyPr rot="-60000000" spcFirstLastPara="1" vertOverflow="ellipsis" vert="horz" wrap="square" anchor="ctr" anchorCtr="1"/>
-          <a:lstStyle/>
-          <a:p>
-            <a:pPr>
-              <a:defRPr sz="2400" b="0" i="0" u="none" strike="noStrike" kern="1200" baseline="0">
-                <a:solidFill>
-                  <a:schemeClr val="tx1"/>
-                </a:solidFill>
-                <a:latin typeface="+mn-lt"/>
-                <a:ea typeface="+mn-ea"/>
-                <a:cs typeface="+mn-cs"/>
-              </a:defRPr>
-            </a:pPr>
-            <a:endParaRPr lang="en-US"/>
-          </a:p>
-        </c:txPr>
-        <c:crossAx val="1785060687"/>
-        <c:crosses val="autoZero"/>
-        <c:auto val="1"/>
-        <c:lblAlgn val="ctr"/>
-        <c:lblOffset val="100"/>
-        <c:noMultiLvlLbl val="0"/>
-      </c:catAx>
-      <c:valAx>
-        <c:axId val="1785060687"/>
-        <c:scaling>
-          <c:orientation val="minMax"/>
-          <c:min val="0"/>
-        </c:scaling>
-        <c:delete val="0"/>
-        <c:axPos val="l"/>
-        <c:majorGridlines>
-          <c:spPr>
-            <a:ln w="9525" cap="flat" cmpd="sng" algn="ctr">
-              <a:solidFill>
-                <a:schemeClr val="tx1">
-                  <a:lumMod val="15000"/>
-                  <a:lumOff val="85000"/>
-                </a:schemeClr>
-              </a:solidFill>
-              <a:round/>
-            </a:ln>
-            <a:effectLst/>
-          </c:spPr>
-        </c:majorGridlines>
-        <c:title>
-          <c:tx>
-            <c:rich>
-              <a:bodyPr rot="-5400000" spcFirstLastPara="1" vertOverflow="ellipsis" vert="horz" wrap="square" anchor="ctr" anchorCtr="1"/>
-              <a:lstStyle/>
-              <a:p>
-                <a:pPr>
-                  <a:defRPr sz="2400" b="0" i="0" u="none" strike="noStrike" kern="1200" baseline="0">
-                    <a:solidFill>
-                      <a:schemeClr val="tx1"/>
-                    </a:solidFill>
-                    <a:latin typeface="+mn-lt"/>
-                    <a:ea typeface="+mn-ea"/>
-                    <a:cs typeface="+mn-cs"/>
-                  </a:defRPr>
-                </a:pPr>
-                <a:r>
-                  <a:rPr lang="en-US"/>
-                  <a:t>PKD Prevalence per 100,000</a:t>
-                </a:r>
-              </a:p>
-            </c:rich>
-          </c:tx>
-          <c:overlay val="0"/>
-          <c:spPr>
-            <a:noFill/>
-            <a:ln>
-              <a:noFill/>
-            </a:ln>
-            <a:effectLst/>
-          </c:spPr>
-          <c:txPr>
-            <a:bodyPr rot="-5400000" spcFirstLastPara="1" vertOverflow="ellipsis" vert="horz" wrap="square" anchor="ctr" anchorCtr="1"/>
-            <a:lstStyle/>
-            <a:p>
-              <a:pPr>
-                <a:defRPr sz="2400" b="0" i="0" u="none" strike="noStrike" kern="1200" baseline="0">
-                  <a:solidFill>
-                    <a:schemeClr val="tx1"/>
-                  </a:solidFill>
-                  <a:latin typeface="+mn-lt"/>
-                  <a:ea typeface="+mn-ea"/>
-                  <a:cs typeface="+mn-cs"/>
-                </a:defRPr>
-              </a:pPr>
-              <a:endParaRPr lang="en-US"/>
-            </a:p>
-          </c:txPr>
-        </c:title>
-        <c:numFmt formatCode="General" sourceLinked="1"/>
-        <c:majorTickMark val="none"/>
-        <c:minorTickMark val="none"/>
-        <c:tickLblPos val="nextTo"/>
-        <c:spPr>
-          <a:noFill/>
-          <a:ln>
-            <a:noFill/>
-          </a:ln>
-          <a:effectLst/>
-        </c:spPr>
-        <c:txPr>
-          <a:bodyPr rot="-60000000" spcFirstLastPara="1" vertOverflow="ellipsis" vert="horz" wrap="square" anchor="ctr" anchorCtr="1"/>
-          <a:lstStyle/>
-          <a:p>
-            <a:pPr>
-              <a:defRPr sz="2400" b="0" i="0" u="none" strike="noStrike" kern="1200" baseline="0">
-                <a:solidFill>
-                  <a:schemeClr val="tx1"/>
-                </a:solidFill>
-                <a:latin typeface="+mn-lt"/>
-                <a:ea typeface="+mn-ea"/>
-                <a:cs typeface="+mn-cs"/>
-              </a:defRPr>
-            </a:pPr>
-            <a:endParaRPr lang="en-US"/>
-          </a:p>
-        </c:txPr>
-        <c:crossAx val="1785061167"/>
-        <c:crosses val="autoZero"/>
-        <c:crossBetween val="between"/>
-      </c:valAx>
-      <c:spPr>
-        <a:noFill/>
-        <a:ln>
-          <a:noFill/>
-        </a:ln>
-        <a:effectLst/>
-      </c:spPr>
-    </c:plotArea>
-    <c:legend>
-      <c:legendPos val="b"/>
-      <c:overlay val="0"/>
-      <c:spPr>
-        <a:noFill/>
-        <a:ln>
-          <a:noFill/>
-        </a:ln>
-        <a:effectLst/>
-      </c:spPr>
-      <c:txPr>
-        <a:bodyPr rot="0" spcFirstLastPara="1" vertOverflow="ellipsis" vert="horz" wrap="square" anchor="ctr" anchorCtr="1"/>
-        <a:lstStyle/>
-        <a:p>
-          <a:pPr>
-            <a:defRPr sz="2400" b="0" i="0" u="none" strike="noStrike" kern="1200" baseline="0">
-              <a:solidFill>
-                <a:schemeClr val="tx1"/>
-              </a:solidFill>
-              <a:latin typeface="+mn-lt"/>
-              <a:ea typeface="+mn-ea"/>
-              <a:cs typeface="+mn-cs"/>
-            </a:defRPr>
-          </a:pPr>
-          <a:endParaRPr lang="en-US"/>
-        </a:p>
-      </c:txPr>
-    </c:legend>
-    <c:plotVisOnly val="1"/>
-    <c:dispBlanksAs val="gap"/>
-    <c:showDLblsOverMax val="0"/>
-  </c:chart>
-  <c:spPr>
-    <a:noFill/>
-    <a:ln>
-      <a:noFill/>
-    </a:ln>
-    <a:effectLst/>
-  </c:spPr>
-  <c:txPr>
-    <a:bodyPr/>
-    <a:lstStyle/>
-    <a:p>
-      <a:pPr>
-        <a:defRPr sz="2400" b="0">
-          <a:solidFill>
-            <a:schemeClr val="tx1"/>
-          </a:solidFill>
-        </a:defRPr>
-      </a:pPr>
-      <a:endParaRPr lang="en-US"/>
-    </a:p>
-  </c:txPr>
-  <c:externalData r:id="rId4">
-    <c:autoUpdate val="0"/>
-  </c:externalData>
-</c:chartSpace>
-</file>
-
-<file path=ppt/charts/chart6.xml><?xml version="1.0" encoding="utf-8"?>
-<c:chartSpace xmlns:c="http://schemas.openxmlformats.org/drawingml/2006/chart" xmlns:a="http://schemas.openxmlformats.org/drawingml/2006/main" xmlns:r="http://schemas.openxmlformats.org/officeDocument/2006/relationships" xmlns:c16r2="http://schemas.microsoft.com/office/drawing/2015/06/chart">
-  <c:date1904 val="0"/>
-  <c:lang val="en-US"/>
-  <c:roundedCorners val="0"/>
-  <mc:AlternateContent xmlns:mc="http://schemas.openxmlformats.org/markup-compatibility/2006">
-    <mc:Choice xmlns:c14="http://schemas.microsoft.com/office/drawing/2007/8/2/chart" Requires="c14">
-      <c14:style val="102"/>
-    </mc:Choice>
-    <mc:Fallback>
-      <c:style val="2"/>
-    </mc:Fallback>
-  </mc:AlternateContent>
-  <c:clrMapOvr bg1="lt1" tx1="dk1" bg2="lt2" tx2="dk2" accent1="accent1" accent2="accent2" accent3="accent3" accent4="accent4" accent5="accent5" accent6="accent6" hlink="hlink" folHlink="folHlink"/>
-  <c:chart>
-    <c:autoTitleDeleted val="1"/>
-    <c:plotArea>
-      <c:layout/>
-      <c:barChart>
-        <c:barDir val="col"/>
-        <c:grouping val="clustered"/>
-        <c:varyColors val="0"/>
-        <c:ser>
-          <c:idx val="0"/>
-          <c:order val="0"/>
-          <c:tx>
-            <c:strRef>
-              <c:f>PKDPeriodPrevRace!$K$1</c:f>
-              <c:strCache>
-                <c:ptCount val="1"/>
-                <c:pt idx="0">
-                  <c:v>2016-2018</c:v>
-                </c:pt>
-              </c:strCache>
-            </c:strRef>
-          </c:tx>
-          <c:spPr>
-            <a:solidFill>
-              <a:schemeClr val="accent1"/>
-            </a:solidFill>
-            <a:ln>
-              <a:noFill/>
-            </a:ln>
-            <a:effectLst/>
-          </c:spPr>
-          <c:invertIfNegative val="0"/>
-          <c:cat>
-            <c:strRef>
-              <c:f>PKDPeriodPrevRace!$J$2:$J$7</c:f>
-              <c:strCache>
-                <c:ptCount val="6"/>
-                <c:pt idx="0">
-                  <c:v>Asian American/Pacific Islander</c:v>
-                </c:pt>
-                <c:pt idx="1">
-                  <c:v>Black</c:v>
-                </c:pt>
-                <c:pt idx="2">
-                  <c:v>Native American/Alaska Native</c:v>
-                </c:pt>
-                <c:pt idx="3">
-                  <c:v>White</c:v>
-                </c:pt>
-                <c:pt idx="4">
-                  <c:v>Other</c:v>
-                </c:pt>
-                <c:pt idx="5">
-                  <c:v>Unknown/Missing</c:v>
-                </c:pt>
-              </c:strCache>
-            </c:strRef>
-          </c:cat>
-          <c:val>
-            <c:numRef>
-              <c:f>PKDPeriodPrevRace!$K$2:$K$7</c:f>
-              <c:numCache>
-                <c:formatCode>General</c:formatCode>
-                <c:ptCount val="6"/>
-                <c:pt idx="0">
-                  <c:v>47.64</c:v>
-                </c:pt>
-                <c:pt idx="1">
-                  <c:v>73.569999999999993</c:v>
-                </c:pt>
-                <c:pt idx="2">
-                  <c:v>49.78</c:v>
-                </c:pt>
-                <c:pt idx="3">
-                  <c:v>53.05</c:v>
-                </c:pt>
-                <c:pt idx="4">
-                  <c:v>64.48</c:v>
-                </c:pt>
-                <c:pt idx="5">
-                  <c:v>62.79</c:v>
-                </c:pt>
-              </c:numCache>
-            </c:numRef>
-          </c:val>
-          <c:extLst>
-            <c:ext xmlns:c16="http://schemas.microsoft.com/office/drawing/2014/chart" uri="{C3380CC4-5D6E-409C-BE32-E72D297353CC}">
-              <c16:uniqueId val="{00000000-840D-4FDE-BCC7-08A09E05F3CD}"/>
-            </c:ext>
-          </c:extLst>
-        </c:ser>
-        <c:ser>
-          <c:idx val="1"/>
-          <c:order val="1"/>
-          <c:tx>
-            <c:strRef>
-              <c:f>PKDPeriodPrevRace!$L$1</c:f>
-              <c:strCache>
-                <c:ptCount val="1"/>
-                <c:pt idx="0">
-                  <c:v>2019-2021</c:v>
-                </c:pt>
-              </c:strCache>
-            </c:strRef>
-          </c:tx>
-          <c:spPr>
-            <a:solidFill>
-              <a:schemeClr val="accent2"/>
-            </a:solidFill>
-            <a:ln>
-              <a:noFill/>
-            </a:ln>
-            <a:effectLst/>
-          </c:spPr>
-          <c:invertIfNegative val="0"/>
-          <c:cat>
-            <c:strRef>
-              <c:f>PKDPeriodPrevRace!$J$2:$J$7</c:f>
-              <c:strCache>
-                <c:ptCount val="6"/>
-                <c:pt idx="0">
-                  <c:v>Asian American/Pacific Islander</c:v>
-                </c:pt>
-                <c:pt idx="1">
-                  <c:v>Black</c:v>
-                </c:pt>
-                <c:pt idx="2">
-                  <c:v>Native American/Alaska Native</c:v>
-                </c:pt>
-                <c:pt idx="3">
-                  <c:v>White</c:v>
-                </c:pt>
-                <c:pt idx="4">
-                  <c:v>Other</c:v>
-                </c:pt>
-                <c:pt idx="5">
-                  <c:v>Unknown/Missing</c:v>
-                </c:pt>
-              </c:strCache>
-            </c:strRef>
-          </c:cat>
-          <c:val>
-            <c:numRef>
-              <c:f>PKDPeriodPrevRace!$L$2:$L$7</c:f>
-              <c:numCache>
-                <c:formatCode>General</c:formatCode>
-                <c:ptCount val="6"/>
-                <c:pt idx="0">
-                  <c:v>43.93</c:v>
-                </c:pt>
-                <c:pt idx="1">
-                  <c:v>72.400000000000006</c:v>
-                </c:pt>
-                <c:pt idx="2">
-                  <c:v>41.45</c:v>
-                </c:pt>
-                <c:pt idx="3">
-                  <c:v>50.3</c:v>
-                </c:pt>
-                <c:pt idx="4">
-                  <c:v>58.42</c:v>
-                </c:pt>
-                <c:pt idx="5">
-                  <c:v>53.8</c:v>
-                </c:pt>
-              </c:numCache>
-            </c:numRef>
-          </c:val>
-          <c:extLst>
-            <c:ext xmlns:c16="http://schemas.microsoft.com/office/drawing/2014/chart" uri="{C3380CC4-5D6E-409C-BE32-E72D297353CC}">
-              <c16:uniqueId val="{00000001-840D-4FDE-BCC7-08A09E05F3CD}"/>
-            </c:ext>
-          </c:extLst>
-        </c:ser>
-        <c:dLbls>
-          <c:showLegendKey val="0"/>
-          <c:showVal val="0"/>
-          <c:showCatName val="0"/>
-          <c:showSerName val="0"/>
-          <c:showPercent val="0"/>
-          <c:showBubbleSize val="0"/>
-        </c:dLbls>
-        <c:gapWidth val="219"/>
-        <c:overlap val="-27"/>
-        <c:axId val="457444336"/>
-        <c:axId val="457446416"/>
-      </c:barChart>
-      <c:catAx>
-        <c:axId val="457444336"/>
-        <c:scaling>
-          <c:orientation val="minMax"/>
-        </c:scaling>
-        <c:delete val="0"/>
-        <c:axPos val="b"/>
-        <c:numFmt formatCode="General" sourceLinked="1"/>
-        <c:majorTickMark val="none"/>
-        <c:minorTickMark val="none"/>
-        <c:tickLblPos val="nextTo"/>
-        <c:spPr>
-          <a:noFill/>
-          <a:ln w="9525" cap="flat" cmpd="sng" algn="ctr">
-            <a:solidFill>
-              <a:schemeClr val="tx1">
-                <a:lumMod val="15000"/>
-                <a:lumOff val="85000"/>
-              </a:schemeClr>
-            </a:solidFill>
-            <a:round/>
-          </a:ln>
-          <a:effectLst/>
-        </c:spPr>
-        <c:txPr>
-          <a:bodyPr rot="-60000000" spcFirstLastPara="1" vertOverflow="ellipsis" vert="horz" wrap="square" anchor="ctr" anchorCtr="1"/>
-          <a:lstStyle/>
-          <a:p>
-            <a:pPr>
-              <a:defRPr sz="1800" b="0" i="0" u="none" strike="noStrike" kern="1200" baseline="0">
-                <a:solidFill>
-                  <a:schemeClr val="tx1"/>
-                </a:solidFill>
-                <a:latin typeface="+mn-lt"/>
-                <a:ea typeface="+mn-ea"/>
-                <a:cs typeface="+mn-cs"/>
-              </a:defRPr>
-            </a:pPr>
-            <a:endParaRPr lang="en-US"/>
-          </a:p>
-        </c:txPr>
-        <c:crossAx val="457446416"/>
-        <c:crosses val="autoZero"/>
-        <c:auto val="1"/>
-        <c:lblAlgn val="ctr"/>
-        <c:lblOffset val="100"/>
-        <c:noMultiLvlLbl val="0"/>
-      </c:catAx>
-      <c:valAx>
-        <c:axId val="457446416"/>
-        <c:scaling>
-          <c:orientation val="minMax"/>
-          <c:max val="140"/>
-        </c:scaling>
-        <c:delete val="0"/>
-        <c:axPos val="l"/>
-        <c:majorGridlines>
-          <c:spPr>
-            <a:ln w="9525" cap="flat" cmpd="sng" algn="ctr">
-              <a:solidFill>
-                <a:schemeClr val="tx1">
-                  <a:lumMod val="15000"/>
-                  <a:lumOff val="85000"/>
-                </a:schemeClr>
-              </a:solidFill>
-              <a:round/>
-            </a:ln>
-            <a:effectLst/>
-          </c:spPr>
-        </c:majorGridlines>
-        <c:title>
-          <c:tx>
-            <c:rich>
-              <a:bodyPr rot="-5400000" spcFirstLastPara="1" vertOverflow="ellipsis" vert="horz" wrap="square" anchor="ctr" anchorCtr="1"/>
-              <a:lstStyle/>
-              <a:p>
-                <a:pPr>
-                  <a:defRPr sz="2000" b="0" i="0" u="none" strike="noStrike" kern="1200" baseline="0">
-                    <a:solidFill>
-                      <a:schemeClr val="tx1"/>
-                    </a:solidFill>
-                    <a:latin typeface="+mn-lt"/>
-                    <a:ea typeface="+mn-ea"/>
-                    <a:cs typeface="+mn-cs"/>
-                  </a:defRPr>
-                </a:pPr>
-                <a:r>
-                  <a:rPr lang="en-US" sz="2000" dirty="0"/>
                   <a:t>PKD Prevalence per 100,000</a:t>
                 </a:r>
               </a:p>
@@ -2800,7 +2029,825 @@
           <a:lstStyle/>
           <a:p>
             <a:pPr>
-              <a:defRPr sz="1800" b="0" i="0" u="none" strike="noStrike" kern="1200" baseline="0">
+              <a:defRPr sz="2000" b="0" i="0" u="none" strike="noStrike" kern="1200" baseline="0">
+                <a:solidFill>
+                  <a:schemeClr val="tx1"/>
+                </a:solidFill>
+                <a:latin typeface="+mn-lt"/>
+                <a:ea typeface="+mn-ea"/>
+                <a:cs typeface="+mn-cs"/>
+              </a:defRPr>
+            </a:pPr>
+            <a:endParaRPr lang="en-US"/>
+          </a:p>
+        </c:txPr>
+        <c:crossAx val="1785061167"/>
+        <c:crosses val="autoZero"/>
+        <c:crossBetween val="between"/>
+      </c:valAx>
+      <c:spPr>
+        <a:noFill/>
+        <a:ln>
+          <a:noFill/>
+        </a:ln>
+        <a:effectLst/>
+      </c:spPr>
+    </c:plotArea>
+    <c:legend>
+      <c:legendPos val="b"/>
+      <c:overlay val="0"/>
+      <c:spPr>
+        <a:noFill/>
+        <a:ln>
+          <a:noFill/>
+        </a:ln>
+        <a:effectLst/>
+      </c:spPr>
+      <c:txPr>
+        <a:bodyPr rot="0" spcFirstLastPara="1" vertOverflow="ellipsis" vert="horz" wrap="square" anchor="ctr" anchorCtr="1"/>
+        <a:lstStyle/>
+        <a:p>
+          <a:pPr>
+            <a:defRPr sz="2000" b="0" i="0" u="none" strike="noStrike" kern="1200" baseline="0">
+              <a:solidFill>
+                <a:schemeClr val="tx1"/>
+              </a:solidFill>
+              <a:latin typeface="+mn-lt"/>
+              <a:ea typeface="+mn-ea"/>
+              <a:cs typeface="+mn-cs"/>
+            </a:defRPr>
+          </a:pPr>
+          <a:endParaRPr lang="en-US"/>
+        </a:p>
+      </c:txPr>
+    </c:legend>
+    <c:plotVisOnly val="1"/>
+    <c:dispBlanksAs val="gap"/>
+    <c:showDLblsOverMax val="0"/>
+  </c:chart>
+  <c:spPr>
+    <a:noFill/>
+    <a:ln>
+      <a:noFill/>
+    </a:ln>
+    <a:effectLst/>
+  </c:spPr>
+  <c:txPr>
+    <a:bodyPr/>
+    <a:lstStyle/>
+    <a:p>
+      <a:pPr>
+        <a:defRPr sz="2000">
+          <a:solidFill>
+            <a:schemeClr val="tx1"/>
+          </a:solidFill>
+          <a:latin typeface="+mn-lt"/>
+        </a:defRPr>
+      </a:pPr>
+      <a:endParaRPr lang="en-US"/>
+    </a:p>
+  </c:txPr>
+  <c:externalData r:id="rId4">
+    <c:autoUpdate val="0"/>
+  </c:externalData>
+</c:chartSpace>
+</file>
+
+<file path=ppt/charts/chart5.xml><?xml version="1.0" encoding="utf-8"?>
+<c:chartSpace xmlns:c="http://schemas.openxmlformats.org/drawingml/2006/chart" xmlns:a="http://schemas.openxmlformats.org/drawingml/2006/main" xmlns:r="http://schemas.openxmlformats.org/officeDocument/2006/relationships" xmlns:c16r2="http://schemas.microsoft.com/office/drawing/2015/06/chart">
+  <c:date1904 val="0"/>
+  <c:lang val="en-US"/>
+  <c:roundedCorners val="0"/>
+  <mc:AlternateContent xmlns:mc="http://schemas.openxmlformats.org/markup-compatibility/2006">
+    <mc:Choice xmlns:c14="http://schemas.microsoft.com/office/drawing/2007/8/2/chart" Requires="c14">
+      <c14:style val="102"/>
+    </mc:Choice>
+    <mc:Fallback>
+      <c:style val="2"/>
+    </mc:Fallback>
+  </mc:AlternateContent>
+  <c:clrMapOvr bg1="lt1" tx1="dk1" bg2="lt2" tx2="dk2" accent1="accent1" accent2="accent2" accent3="accent3" accent4="accent4" accent5="accent5" accent6="accent6" hlink="hlink" folHlink="folHlink"/>
+  <c:chart>
+    <c:autoTitleDeleted val="1"/>
+    <c:plotArea>
+      <c:layout/>
+      <c:barChart>
+        <c:barDir val="col"/>
+        <c:grouping val="clustered"/>
+        <c:varyColors val="0"/>
+        <c:ser>
+          <c:idx val="9"/>
+          <c:order val="0"/>
+          <c:tx>
+            <c:strRef>
+              <c:f>PKDPeriodPrevSex!$AN$29</c:f>
+              <c:strCache>
+                <c:ptCount val="1"/>
+                <c:pt idx="0">
+                  <c:v>2016-2018</c:v>
+                </c:pt>
+              </c:strCache>
+            </c:strRef>
+          </c:tx>
+          <c:spPr>
+            <a:solidFill>
+              <a:schemeClr val="accent4">
+                <a:lumMod val="60000"/>
+              </a:schemeClr>
+            </a:solidFill>
+            <a:ln>
+              <a:noFill/>
+            </a:ln>
+            <a:effectLst/>
+          </c:spPr>
+          <c:invertIfNegative val="0"/>
+          <c:cat>
+            <c:strRef>
+              <c:f>PKDPeriodPrevSex!$AM$38:$AM$40</c:f>
+              <c:strCache>
+                <c:ptCount val="3"/>
+                <c:pt idx="0">
+                  <c:v>Female</c:v>
+                </c:pt>
+                <c:pt idx="1">
+                  <c:v>Male</c:v>
+                </c:pt>
+                <c:pt idx="2">
+                  <c:v>Overall</c:v>
+                </c:pt>
+              </c:strCache>
+            </c:strRef>
+          </c:cat>
+          <c:val>
+            <c:numRef>
+              <c:f>PKDPeriodPrevSex!$AN$38:$AN$40</c:f>
+              <c:numCache>
+                <c:formatCode>General</c:formatCode>
+                <c:ptCount val="3"/>
+                <c:pt idx="0">
+                  <c:v>87.5</c:v>
+                </c:pt>
+                <c:pt idx="1">
+                  <c:v>90.7</c:v>
+                </c:pt>
+                <c:pt idx="2">
+                  <c:v>86.3</c:v>
+                </c:pt>
+              </c:numCache>
+            </c:numRef>
+          </c:val>
+          <c:extLst>
+            <c:ext xmlns:c16="http://schemas.microsoft.com/office/drawing/2014/chart" uri="{C3380CC4-5D6E-409C-BE32-E72D297353CC}">
+              <c16:uniqueId val="{00000000-00BD-4B2E-81E9-AD34D7695928}"/>
+            </c:ext>
+          </c:extLst>
+        </c:ser>
+        <c:ser>
+          <c:idx val="10"/>
+          <c:order val="1"/>
+          <c:tx>
+            <c:strRef>
+              <c:f>PKDPeriodPrevSex!$AO$29</c:f>
+              <c:strCache>
+                <c:ptCount val="1"/>
+                <c:pt idx="0">
+                  <c:v>2019-2021</c:v>
+                </c:pt>
+              </c:strCache>
+            </c:strRef>
+          </c:tx>
+          <c:spPr>
+            <a:solidFill>
+              <a:schemeClr val="accent5">
+                <a:lumMod val="60000"/>
+              </a:schemeClr>
+            </a:solidFill>
+            <a:ln>
+              <a:noFill/>
+            </a:ln>
+            <a:effectLst/>
+          </c:spPr>
+          <c:invertIfNegative val="0"/>
+          <c:cat>
+            <c:strRef>
+              <c:f>PKDPeriodPrevSex!$AM$38:$AM$40</c:f>
+              <c:strCache>
+                <c:ptCount val="3"/>
+                <c:pt idx="0">
+                  <c:v>Female</c:v>
+                </c:pt>
+                <c:pt idx="1">
+                  <c:v>Male</c:v>
+                </c:pt>
+                <c:pt idx="2">
+                  <c:v>Overall</c:v>
+                </c:pt>
+              </c:strCache>
+            </c:strRef>
+          </c:cat>
+          <c:val>
+            <c:numRef>
+              <c:f>PKDPeriodPrevSex!$AO$38:$AO$40</c:f>
+              <c:numCache>
+                <c:formatCode>General</c:formatCode>
+                <c:ptCount val="3"/>
+                <c:pt idx="0">
+                  <c:v>85</c:v>
+                </c:pt>
+                <c:pt idx="1">
+                  <c:v>83.4</c:v>
+                </c:pt>
+                <c:pt idx="2">
+                  <c:v>85.1</c:v>
+                </c:pt>
+              </c:numCache>
+            </c:numRef>
+          </c:val>
+          <c:extLst>
+            <c:ext xmlns:c16="http://schemas.microsoft.com/office/drawing/2014/chart" uri="{C3380CC4-5D6E-409C-BE32-E72D297353CC}">
+              <c16:uniqueId val="{00000001-00BD-4B2E-81E9-AD34D7695928}"/>
+            </c:ext>
+          </c:extLst>
+        </c:ser>
+        <c:dLbls>
+          <c:showLegendKey val="0"/>
+          <c:showVal val="0"/>
+          <c:showCatName val="0"/>
+          <c:showSerName val="0"/>
+          <c:showPercent val="0"/>
+          <c:showBubbleSize val="0"/>
+        </c:dLbls>
+        <c:gapWidth val="150"/>
+        <c:overlap val="-12"/>
+        <c:axId val="1785061167"/>
+        <c:axId val="1785060687"/>
+        <c:extLst/>
+      </c:barChart>
+      <c:catAx>
+        <c:axId val="1785061167"/>
+        <c:scaling>
+          <c:orientation val="minMax"/>
+        </c:scaling>
+        <c:delete val="0"/>
+        <c:axPos val="b"/>
+        <c:numFmt formatCode="General" sourceLinked="1"/>
+        <c:majorTickMark val="none"/>
+        <c:minorTickMark val="none"/>
+        <c:tickLblPos val="nextTo"/>
+        <c:spPr>
+          <a:noFill/>
+          <a:ln w="9525" cap="flat" cmpd="sng" algn="ctr">
+            <a:solidFill>
+              <a:schemeClr val="tx1">
+                <a:lumMod val="15000"/>
+                <a:lumOff val="85000"/>
+              </a:schemeClr>
+            </a:solidFill>
+            <a:round/>
+          </a:ln>
+          <a:effectLst/>
+        </c:spPr>
+        <c:txPr>
+          <a:bodyPr rot="-60000000" spcFirstLastPara="1" vertOverflow="ellipsis" vert="horz" wrap="square" anchor="ctr" anchorCtr="1"/>
+          <a:lstStyle/>
+          <a:p>
+            <a:pPr>
+              <a:defRPr sz="2000" b="0" i="0" u="none" strike="noStrike" kern="1200" baseline="0">
+                <a:solidFill>
+                  <a:schemeClr val="tx1"/>
+                </a:solidFill>
+                <a:latin typeface="+mn-lt"/>
+                <a:ea typeface="+mn-ea"/>
+                <a:cs typeface="+mn-cs"/>
+              </a:defRPr>
+            </a:pPr>
+            <a:endParaRPr lang="en-US"/>
+          </a:p>
+        </c:txPr>
+        <c:crossAx val="1785060687"/>
+        <c:crosses val="autoZero"/>
+        <c:auto val="1"/>
+        <c:lblAlgn val="ctr"/>
+        <c:lblOffset val="100"/>
+        <c:noMultiLvlLbl val="0"/>
+      </c:catAx>
+      <c:valAx>
+        <c:axId val="1785060687"/>
+        <c:scaling>
+          <c:orientation val="minMax"/>
+          <c:min val="0"/>
+        </c:scaling>
+        <c:delete val="0"/>
+        <c:axPos val="l"/>
+        <c:majorGridlines>
+          <c:spPr>
+            <a:ln w="9525" cap="flat" cmpd="sng" algn="ctr">
+              <a:solidFill>
+                <a:schemeClr val="tx1">
+                  <a:lumMod val="15000"/>
+                  <a:lumOff val="85000"/>
+                </a:schemeClr>
+              </a:solidFill>
+              <a:round/>
+            </a:ln>
+            <a:effectLst/>
+          </c:spPr>
+        </c:majorGridlines>
+        <c:title>
+          <c:tx>
+            <c:rich>
+              <a:bodyPr rot="-5400000" spcFirstLastPara="1" vertOverflow="ellipsis" vert="horz" wrap="square" anchor="ctr" anchorCtr="1"/>
+              <a:lstStyle/>
+              <a:p>
+                <a:pPr>
+                  <a:defRPr sz="2000" b="0" i="0" u="none" strike="noStrike" kern="1200" baseline="0">
+                    <a:solidFill>
+                      <a:schemeClr val="tx1"/>
+                    </a:solidFill>
+                    <a:latin typeface="+mn-lt"/>
+                    <a:ea typeface="+mn-ea"/>
+                    <a:cs typeface="+mn-cs"/>
+                  </a:defRPr>
+                </a:pPr>
+                <a:r>
+                  <a:rPr lang="en-US"/>
+                  <a:t>PKD Prevalence per 100,000</a:t>
+                </a:r>
+              </a:p>
+            </c:rich>
+          </c:tx>
+          <c:overlay val="0"/>
+          <c:spPr>
+            <a:noFill/>
+            <a:ln>
+              <a:noFill/>
+            </a:ln>
+            <a:effectLst/>
+          </c:spPr>
+          <c:txPr>
+            <a:bodyPr rot="-5400000" spcFirstLastPara="1" vertOverflow="ellipsis" vert="horz" wrap="square" anchor="ctr" anchorCtr="1"/>
+            <a:lstStyle/>
+            <a:p>
+              <a:pPr>
+                <a:defRPr sz="2000" b="0" i="0" u="none" strike="noStrike" kern="1200" baseline="0">
+                  <a:solidFill>
+                    <a:schemeClr val="tx1"/>
+                  </a:solidFill>
+                  <a:latin typeface="+mn-lt"/>
+                  <a:ea typeface="+mn-ea"/>
+                  <a:cs typeface="+mn-cs"/>
+                </a:defRPr>
+              </a:pPr>
+              <a:endParaRPr lang="en-US"/>
+            </a:p>
+          </c:txPr>
+        </c:title>
+        <c:numFmt formatCode="General" sourceLinked="1"/>
+        <c:majorTickMark val="none"/>
+        <c:minorTickMark val="none"/>
+        <c:tickLblPos val="nextTo"/>
+        <c:spPr>
+          <a:noFill/>
+          <a:ln>
+            <a:noFill/>
+          </a:ln>
+          <a:effectLst/>
+        </c:spPr>
+        <c:txPr>
+          <a:bodyPr rot="-60000000" spcFirstLastPara="1" vertOverflow="ellipsis" vert="horz" wrap="square" anchor="ctr" anchorCtr="1"/>
+          <a:lstStyle/>
+          <a:p>
+            <a:pPr>
+              <a:defRPr sz="2000" b="0" i="0" u="none" strike="noStrike" kern="1200" baseline="0">
+                <a:solidFill>
+                  <a:schemeClr val="tx1"/>
+                </a:solidFill>
+                <a:latin typeface="+mn-lt"/>
+                <a:ea typeface="+mn-ea"/>
+                <a:cs typeface="+mn-cs"/>
+              </a:defRPr>
+            </a:pPr>
+            <a:endParaRPr lang="en-US"/>
+          </a:p>
+        </c:txPr>
+        <c:crossAx val="1785061167"/>
+        <c:crosses val="autoZero"/>
+        <c:crossBetween val="between"/>
+      </c:valAx>
+      <c:spPr>
+        <a:noFill/>
+        <a:ln>
+          <a:noFill/>
+        </a:ln>
+        <a:effectLst/>
+      </c:spPr>
+    </c:plotArea>
+    <c:legend>
+      <c:legendPos val="b"/>
+      <c:overlay val="0"/>
+      <c:spPr>
+        <a:noFill/>
+        <a:ln>
+          <a:noFill/>
+        </a:ln>
+        <a:effectLst/>
+      </c:spPr>
+      <c:txPr>
+        <a:bodyPr rot="0" spcFirstLastPara="1" vertOverflow="ellipsis" vert="horz" wrap="square" anchor="ctr" anchorCtr="1"/>
+        <a:lstStyle/>
+        <a:p>
+          <a:pPr>
+            <a:defRPr sz="2000" b="0" i="0" u="none" strike="noStrike" kern="1200" baseline="0">
+              <a:solidFill>
+                <a:schemeClr val="tx1"/>
+              </a:solidFill>
+              <a:latin typeface="+mn-lt"/>
+              <a:ea typeface="+mn-ea"/>
+              <a:cs typeface="+mn-cs"/>
+            </a:defRPr>
+          </a:pPr>
+          <a:endParaRPr lang="en-US"/>
+        </a:p>
+      </c:txPr>
+    </c:legend>
+    <c:plotVisOnly val="1"/>
+    <c:dispBlanksAs val="gap"/>
+    <c:showDLblsOverMax val="0"/>
+  </c:chart>
+  <c:spPr>
+    <a:noFill/>
+    <a:ln>
+      <a:noFill/>
+    </a:ln>
+    <a:effectLst/>
+  </c:spPr>
+  <c:txPr>
+    <a:bodyPr/>
+    <a:lstStyle/>
+    <a:p>
+      <a:pPr>
+        <a:defRPr sz="2000">
+          <a:solidFill>
+            <a:schemeClr val="tx1"/>
+          </a:solidFill>
+        </a:defRPr>
+      </a:pPr>
+      <a:endParaRPr lang="en-US"/>
+    </a:p>
+  </c:txPr>
+  <c:externalData r:id="rId4">
+    <c:autoUpdate val="0"/>
+  </c:externalData>
+</c:chartSpace>
+</file>
+
+<file path=ppt/charts/chart6.xml><?xml version="1.0" encoding="utf-8"?>
+<c:chartSpace xmlns:c="http://schemas.openxmlformats.org/drawingml/2006/chart" xmlns:a="http://schemas.openxmlformats.org/drawingml/2006/main" xmlns:r="http://schemas.openxmlformats.org/officeDocument/2006/relationships" xmlns:c16r2="http://schemas.microsoft.com/office/drawing/2015/06/chart">
+  <c:date1904 val="0"/>
+  <c:lang val="en-US"/>
+  <c:roundedCorners val="0"/>
+  <mc:AlternateContent xmlns:mc="http://schemas.openxmlformats.org/markup-compatibility/2006">
+    <mc:Choice xmlns:c14="http://schemas.microsoft.com/office/drawing/2007/8/2/chart" Requires="c14">
+      <c14:style val="102"/>
+    </mc:Choice>
+    <mc:Fallback>
+      <c:style val="2"/>
+    </mc:Fallback>
+  </mc:AlternateContent>
+  <c:chart>
+    <c:autoTitleDeleted val="1"/>
+    <c:plotArea>
+      <c:layout/>
+      <c:barChart>
+        <c:barDir val="col"/>
+        <c:grouping val="clustered"/>
+        <c:varyColors val="0"/>
+        <c:ser>
+          <c:idx val="0"/>
+          <c:order val="0"/>
+          <c:tx>
+            <c:strRef>
+              <c:f>PKDPeriodPrevRace!$K$1</c:f>
+              <c:strCache>
+                <c:ptCount val="1"/>
+                <c:pt idx="0">
+                  <c:v>2016-2018</c:v>
+                </c:pt>
+              </c:strCache>
+            </c:strRef>
+          </c:tx>
+          <c:spPr>
+            <a:solidFill>
+              <a:schemeClr val="accent1"/>
+            </a:solidFill>
+            <a:ln>
+              <a:noFill/>
+            </a:ln>
+            <a:effectLst/>
+          </c:spPr>
+          <c:invertIfNegative val="0"/>
+          <c:cat>
+            <c:strRef>
+              <c:f>PKDPeriodPrevRace!$J$2:$J$8</c:f>
+              <c:strCache>
+                <c:ptCount val="7"/>
+                <c:pt idx="0">
+                  <c:v>Asian American/Pacific Islander</c:v>
+                </c:pt>
+                <c:pt idx="1">
+                  <c:v>Black</c:v>
+                </c:pt>
+                <c:pt idx="2">
+                  <c:v>American Indian/Alaska Native</c:v>
+                </c:pt>
+                <c:pt idx="3">
+                  <c:v>White</c:v>
+                </c:pt>
+                <c:pt idx="4">
+                  <c:v>Other</c:v>
+                </c:pt>
+                <c:pt idx="5">
+                  <c:v>Unknown/Missing</c:v>
+                </c:pt>
+                <c:pt idx="6">
+                  <c:v>Overall</c:v>
+                </c:pt>
+              </c:strCache>
+            </c:strRef>
+          </c:cat>
+          <c:val>
+            <c:numRef>
+              <c:f>PKDPeriodPrevRace!$K$2:$K$8</c:f>
+              <c:numCache>
+                <c:formatCode>General</c:formatCode>
+                <c:ptCount val="7"/>
+                <c:pt idx="0">
+                  <c:v>47.64</c:v>
+                </c:pt>
+                <c:pt idx="1">
+                  <c:v>73.569999999999993</c:v>
+                </c:pt>
+                <c:pt idx="2">
+                  <c:v>49.78</c:v>
+                </c:pt>
+                <c:pt idx="3">
+                  <c:v>53.05</c:v>
+                </c:pt>
+                <c:pt idx="4">
+                  <c:v>64.48</c:v>
+                </c:pt>
+                <c:pt idx="5">
+                  <c:v>62.79</c:v>
+                </c:pt>
+                <c:pt idx="6">
+                  <c:v>58.21</c:v>
+                </c:pt>
+              </c:numCache>
+            </c:numRef>
+          </c:val>
+          <c:extLst>
+            <c:ext xmlns:c16="http://schemas.microsoft.com/office/drawing/2014/chart" uri="{C3380CC4-5D6E-409C-BE32-E72D297353CC}">
+              <c16:uniqueId val="{00000000-2A00-4758-A25F-2F3BE5E92799}"/>
+            </c:ext>
+          </c:extLst>
+        </c:ser>
+        <c:ser>
+          <c:idx val="1"/>
+          <c:order val="1"/>
+          <c:tx>
+            <c:strRef>
+              <c:f>PKDPeriodPrevRace!$L$1</c:f>
+              <c:strCache>
+                <c:ptCount val="1"/>
+                <c:pt idx="0">
+                  <c:v>2019-2021</c:v>
+                </c:pt>
+              </c:strCache>
+            </c:strRef>
+          </c:tx>
+          <c:spPr>
+            <a:solidFill>
+              <a:schemeClr val="accent2"/>
+            </a:solidFill>
+            <a:ln>
+              <a:noFill/>
+            </a:ln>
+            <a:effectLst/>
+          </c:spPr>
+          <c:invertIfNegative val="0"/>
+          <c:cat>
+            <c:strRef>
+              <c:f>PKDPeriodPrevRace!$J$2:$J$8</c:f>
+              <c:strCache>
+                <c:ptCount val="7"/>
+                <c:pt idx="0">
+                  <c:v>Asian American/Pacific Islander</c:v>
+                </c:pt>
+                <c:pt idx="1">
+                  <c:v>Black</c:v>
+                </c:pt>
+                <c:pt idx="2">
+                  <c:v>American Indian/Alaska Native</c:v>
+                </c:pt>
+                <c:pt idx="3">
+                  <c:v>White</c:v>
+                </c:pt>
+                <c:pt idx="4">
+                  <c:v>Other</c:v>
+                </c:pt>
+                <c:pt idx="5">
+                  <c:v>Unknown/Missing</c:v>
+                </c:pt>
+                <c:pt idx="6">
+                  <c:v>Overall</c:v>
+                </c:pt>
+              </c:strCache>
+            </c:strRef>
+          </c:cat>
+          <c:val>
+            <c:numRef>
+              <c:f>PKDPeriodPrevRace!$L$2:$L$8</c:f>
+              <c:numCache>
+                <c:formatCode>General</c:formatCode>
+                <c:ptCount val="7"/>
+                <c:pt idx="0">
+                  <c:v>43.93</c:v>
+                </c:pt>
+                <c:pt idx="1">
+                  <c:v>72.400000000000006</c:v>
+                </c:pt>
+                <c:pt idx="2">
+                  <c:v>41.45</c:v>
+                </c:pt>
+                <c:pt idx="3">
+                  <c:v>50.3</c:v>
+                </c:pt>
+                <c:pt idx="4">
+                  <c:v>58.42</c:v>
+                </c:pt>
+                <c:pt idx="5">
+                  <c:v>53.8</c:v>
+                </c:pt>
+                <c:pt idx="6">
+                  <c:v>54.23</c:v>
+                </c:pt>
+              </c:numCache>
+            </c:numRef>
+          </c:val>
+          <c:extLst>
+            <c:ext xmlns:c16="http://schemas.microsoft.com/office/drawing/2014/chart" uri="{C3380CC4-5D6E-409C-BE32-E72D297353CC}">
+              <c16:uniqueId val="{00000001-2A00-4758-A25F-2F3BE5E92799}"/>
+            </c:ext>
+          </c:extLst>
+        </c:ser>
+        <c:dLbls>
+          <c:showLegendKey val="0"/>
+          <c:showVal val="0"/>
+          <c:showCatName val="0"/>
+          <c:showSerName val="0"/>
+          <c:showPercent val="0"/>
+          <c:showBubbleSize val="0"/>
+        </c:dLbls>
+        <c:gapWidth val="219"/>
+        <c:overlap val="-27"/>
+        <c:axId val="457444336"/>
+        <c:axId val="457446416"/>
+      </c:barChart>
+      <c:catAx>
+        <c:axId val="457444336"/>
+        <c:scaling>
+          <c:orientation val="minMax"/>
+        </c:scaling>
+        <c:delete val="0"/>
+        <c:axPos val="b"/>
+        <c:numFmt formatCode="General" sourceLinked="1"/>
+        <c:majorTickMark val="none"/>
+        <c:minorTickMark val="none"/>
+        <c:tickLblPos val="nextTo"/>
+        <c:spPr>
+          <a:noFill/>
+          <a:ln w="9525" cap="flat" cmpd="sng" algn="ctr">
+            <a:solidFill>
+              <a:schemeClr val="tx1">
+                <a:lumMod val="15000"/>
+                <a:lumOff val="85000"/>
+              </a:schemeClr>
+            </a:solidFill>
+            <a:round/>
+          </a:ln>
+          <a:effectLst/>
+        </c:spPr>
+        <c:txPr>
+          <a:bodyPr rot="0" spcFirstLastPara="1" vertOverflow="ellipsis" wrap="square" anchor="ctr" anchorCtr="1"/>
+          <a:lstStyle/>
+          <a:p>
+            <a:pPr>
+              <a:defRPr sz="1400" b="0" i="0" u="none" strike="noStrike" kern="1200" baseline="0">
+                <a:solidFill>
+                  <a:schemeClr val="tx1"/>
+                </a:solidFill>
+                <a:latin typeface="+mn-lt"/>
+                <a:ea typeface="+mn-ea"/>
+                <a:cs typeface="+mn-cs"/>
+              </a:defRPr>
+            </a:pPr>
+            <a:endParaRPr lang="en-US"/>
+          </a:p>
+        </c:txPr>
+        <c:crossAx val="457446416"/>
+        <c:crosses val="autoZero"/>
+        <c:auto val="0"/>
+        <c:lblAlgn val="ctr"/>
+        <c:lblOffset val="100"/>
+        <c:noMultiLvlLbl val="0"/>
+      </c:catAx>
+      <c:valAx>
+        <c:axId val="457446416"/>
+        <c:scaling>
+          <c:orientation val="minMax"/>
+        </c:scaling>
+        <c:delete val="0"/>
+        <c:axPos val="l"/>
+        <c:majorGridlines>
+          <c:spPr>
+            <a:ln w="9525" cap="flat" cmpd="sng" algn="ctr">
+              <a:solidFill>
+                <a:schemeClr val="tx1">
+                  <a:lumMod val="15000"/>
+                  <a:lumOff val="85000"/>
+                </a:schemeClr>
+              </a:solidFill>
+              <a:round/>
+            </a:ln>
+            <a:effectLst/>
+          </c:spPr>
+        </c:majorGridlines>
+        <c:title>
+          <c:tx>
+            <c:rich>
+              <a:bodyPr rot="-5400000" spcFirstLastPara="1" vertOverflow="ellipsis" vert="horz" wrap="square" anchor="ctr" anchorCtr="1"/>
+              <a:lstStyle/>
+              <a:p>
+                <a:pPr>
+                  <a:defRPr sz="2000" b="0" i="0" u="none" strike="noStrike" kern="1200" baseline="0">
+                    <a:solidFill>
+                      <a:schemeClr val="tx1"/>
+                    </a:solidFill>
+                    <a:latin typeface="+mn-lt"/>
+                    <a:ea typeface="+mn-ea"/>
+                    <a:cs typeface="+mn-cs"/>
+                  </a:defRPr>
+                </a:pPr>
+                <a:r>
+                  <a:rPr lang="en-US"/>
+                  <a:t>PKD Prevalence per 100,000</a:t>
+                </a:r>
+              </a:p>
+            </c:rich>
+          </c:tx>
+          <c:overlay val="0"/>
+          <c:spPr>
+            <a:noFill/>
+            <a:ln>
+              <a:noFill/>
+            </a:ln>
+            <a:effectLst/>
+          </c:spPr>
+          <c:txPr>
+            <a:bodyPr rot="-5400000" spcFirstLastPara="1" vertOverflow="ellipsis" vert="horz" wrap="square" anchor="ctr" anchorCtr="1"/>
+            <a:lstStyle/>
+            <a:p>
+              <a:pPr>
+                <a:defRPr sz="2000" b="0" i="0" u="none" strike="noStrike" kern="1200" baseline="0">
+                  <a:solidFill>
+                    <a:schemeClr val="tx1"/>
+                  </a:solidFill>
+                  <a:latin typeface="+mn-lt"/>
+                  <a:ea typeface="+mn-ea"/>
+                  <a:cs typeface="+mn-cs"/>
+                </a:defRPr>
+              </a:pPr>
+              <a:endParaRPr lang="en-US"/>
+            </a:p>
+          </c:txPr>
+        </c:title>
+        <c:numFmt formatCode="General" sourceLinked="1"/>
+        <c:majorTickMark val="none"/>
+        <c:minorTickMark val="none"/>
+        <c:tickLblPos val="nextTo"/>
+        <c:spPr>
+          <a:noFill/>
+          <a:ln>
+            <a:noFill/>
+          </a:ln>
+          <a:effectLst/>
+        </c:spPr>
+        <c:txPr>
+          <a:bodyPr rot="-60000000" spcFirstLastPara="1" vertOverflow="ellipsis" vert="horz" wrap="square" anchor="ctr" anchorCtr="1"/>
+          <a:lstStyle/>
+          <a:p>
+            <a:pPr>
+              <a:defRPr sz="2000" b="0" i="0" u="none" strike="noStrike" kern="1200" baseline="0">
                 <a:solidFill>
                   <a:schemeClr val="tx1"/>
                 </a:solidFill>
@@ -2854,7 +2901,6 @@
     </c:legend>
     <c:plotVisOnly val="1"/>
     <c:dispBlanksAs val="gap"/>
-    <c:showDLblsOverMax val="0"/>
     <c:extLst>
       <c:ext xmlns:c16r3="http://schemas.microsoft.com/office/drawing/2017/03/chart" uri="{56B9EC1D-385E-4148-901F-78D8002777C0}">
         <c16r3:dataDisplayOptions16>
@@ -2862,6 +2908,7 @@
         </c16r3:dataDisplayOptions16>
       </c:ext>
     </c:extLst>
+    <c:showDLblsOverMax val="0"/>
   </c:chart>
   <c:spPr>
     <a:noFill/>
@@ -2875,7 +2922,7 @@
     <a:lstStyle/>
     <a:p>
       <a:pPr>
-        <a:defRPr sz="1800">
+        <a:defRPr sz="2000">
           <a:solidFill>
             <a:schemeClr val="tx1"/>
           </a:solidFill>
@@ -2884,7 +2931,7 @@
       <a:endParaRPr lang="en-US"/>
     </a:p>
   </c:txPr>
-  <c:externalData r:id="rId4">
+  <c:externalData r:id="rId3">
     <c:autoUpdate val="0"/>
   </c:externalData>
 </c:chartSpace>
@@ -2903,7 +2950,6 @@
       <c:style val="2"/>
     </mc:Fallback>
   </mc:AlternateContent>
-  <c:clrMapOvr bg1="lt1" tx1="dk1" bg2="lt2" tx2="dk2" accent1="accent1" accent2="accent2" accent3="accent3" accent4="accent4" accent5="accent5" accent6="accent6" hlink="hlink" folHlink="folHlink"/>
   <c:chart>
     <c:autoTitleDeleted val="1"/>
     <c:plotArea>
@@ -2938,9 +2984,9 @@
           <c:invertIfNegative val="0"/>
           <c:cat>
             <c:strRef>
-              <c:f>PKDPeriodPrevRace!$J$11:$J$16</c:f>
+              <c:f>PKDPeriodPrevRace!$J$11:$J$17</c:f>
               <c:strCache>
-                <c:ptCount val="6"/>
+                <c:ptCount val="7"/>
                 <c:pt idx="0">
                   <c:v>Asian American/Pacific Islander</c:v>
                 </c:pt>
@@ -2948,7 +2994,7 @@
                   <c:v>Black</c:v>
                 </c:pt>
                 <c:pt idx="2">
-                  <c:v>Native American/Alaska Native</c:v>
+                  <c:v>American Indian/Alaska Native</c:v>
                 </c:pt>
                 <c:pt idx="3">
                   <c:v>White</c:v>
@@ -2958,16 +3004,19 @@
                 </c:pt>
                 <c:pt idx="5">
                   <c:v>Unknown/Missing</c:v>
+                </c:pt>
+                <c:pt idx="6">
+                  <c:v>Overall</c:v>
                 </c:pt>
               </c:strCache>
             </c:strRef>
           </c:cat>
           <c:val>
             <c:numRef>
-              <c:f>PKDPeriodPrevRace!$K$11:$K$16</c:f>
+              <c:f>PKDPeriodPrevRace!$K$11:$K$17</c:f>
               <c:numCache>
                 <c:formatCode>General</c:formatCode>
-                <c:ptCount val="6"/>
+                <c:ptCount val="7"/>
                 <c:pt idx="0">
                   <c:v>73.2</c:v>
                 </c:pt>
@@ -2985,13 +3034,16 @@
                 </c:pt>
                 <c:pt idx="5">
                   <c:v>86.5</c:v>
+                </c:pt>
+                <c:pt idx="6">
+                  <c:v>86.3</c:v>
                 </c:pt>
               </c:numCache>
             </c:numRef>
           </c:val>
           <c:extLst>
             <c:ext xmlns:c16="http://schemas.microsoft.com/office/drawing/2014/chart" uri="{C3380CC4-5D6E-409C-BE32-E72D297353CC}">
-              <c16:uniqueId val="{00000000-D57F-449C-8D74-0CDE3605520E}"/>
+              <c16:uniqueId val="{00000000-1860-4D5D-AF5E-8552E879C481}"/>
             </c:ext>
           </c:extLst>
         </c:ser>
@@ -3021,9 +3073,9 @@
           <c:invertIfNegative val="0"/>
           <c:cat>
             <c:strRef>
-              <c:f>PKDPeriodPrevRace!$J$11:$J$16</c:f>
+              <c:f>PKDPeriodPrevRace!$J$11:$J$17</c:f>
               <c:strCache>
-                <c:ptCount val="6"/>
+                <c:ptCount val="7"/>
                 <c:pt idx="0">
                   <c:v>Asian American/Pacific Islander</c:v>
                 </c:pt>
@@ -3031,7 +3083,7 @@
                   <c:v>Black</c:v>
                 </c:pt>
                 <c:pt idx="2">
-                  <c:v>Native American/Alaska Native</c:v>
+                  <c:v>American Indian/Alaska Native</c:v>
                 </c:pt>
                 <c:pt idx="3">
                   <c:v>White</c:v>
@@ -3041,16 +3093,19 @@
                 </c:pt>
                 <c:pt idx="5">
                   <c:v>Unknown/Missing</c:v>
+                </c:pt>
+                <c:pt idx="6">
+                  <c:v>Overall</c:v>
                 </c:pt>
               </c:strCache>
             </c:strRef>
           </c:cat>
           <c:val>
             <c:numRef>
-              <c:f>PKDPeriodPrevRace!$L$11:$L$16</c:f>
+              <c:f>PKDPeriodPrevRace!$L$11:$L$17</c:f>
               <c:numCache>
                 <c:formatCode>General</c:formatCode>
-                <c:ptCount val="6"/>
+                <c:ptCount val="7"/>
                 <c:pt idx="0">
                   <c:v>69.3</c:v>
                 </c:pt>
@@ -3068,13 +3123,16 @@
                 </c:pt>
                 <c:pt idx="5">
                   <c:v>76.3</c:v>
+                </c:pt>
+                <c:pt idx="6">
+                  <c:v>85.1</c:v>
                 </c:pt>
               </c:numCache>
             </c:numRef>
           </c:val>
           <c:extLst>
             <c:ext xmlns:c16="http://schemas.microsoft.com/office/drawing/2014/chart" uri="{C3380CC4-5D6E-409C-BE32-E72D297353CC}">
-              <c16:uniqueId val="{00000001-D57F-449C-8D74-0CDE3605520E}"/>
+              <c16:uniqueId val="{00000001-1860-4D5D-AF5E-8552E879C481}"/>
             </c:ext>
           </c:extLst>
         </c:ser>
@@ -3120,7 +3178,7 @@
           <a:lstStyle/>
           <a:p>
             <a:pPr>
-              <a:defRPr sz="1800" b="0" i="0" u="none" strike="noStrike" kern="1200" baseline="0">
+              <a:defRPr sz="1400" b="0" i="0" u="none" strike="noStrike" kern="1200" baseline="0">
                 <a:solidFill>
                   <a:schemeClr val="tx1"/>
                 </a:solidFill>
@@ -3177,7 +3235,7 @@
                   </a:defRPr>
                 </a:pPr>
                 <a:r>
-                  <a:rPr lang="en-US" sz="2000" dirty="0"/>
+                  <a:rPr lang="en-US"/>
                   <a:t>PKD Prevalence per 100,000</a:t>
                 </a:r>
               </a:p>
@@ -3225,7 +3283,7 @@
           <a:lstStyle/>
           <a:p>
             <a:pPr>
-              <a:defRPr sz="1800" b="0" i="0" u="none" strike="noStrike" kern="1200" baseline="0">
+              <a:defRPr sz="2000" b="0" i="0" u="none" strike="noStrike" kern="1200" baseline="0">
                 <a:solidFill>
                   <a:schemeClr val="tx1"/>
                 </a:solidFill>
@@ -3279,7 +3337,6 @@
     </c:legend>
     <c:plotVisOnly val="1"/>
     <c:dispBlanksAs val="gap"/>
-    <c:showDLblsOverMax val="0"/>
     <c:extLst>
       <c:ext xmlns:c16r3="http://schemas.microsoft.com/office/drawing/2017/03/chart" uri="{56B9EC1D-385E-4148-901F-78D8002777C0}">
         <c16r3:dataDisplayOptions16>
@@ -3287,6 +3344,7 @@
         </c16r3:dataDisplayOptions16>
       </c:ext>
     </c:extLst>
+    <c:showDLblsOverMax val="0"/>
   </c:chart>
   <c:spPr>
     <a:noFill/>
@@ -3300,7 +3358,7 @@
     <a:lstStyle/>
     <a:p>
       <a:pPr>
-        <a:defRPr sz="1800">
+        <a:defRPr sz="2000">
           <a:solidFill>
             <a:schemeClr val="tx1"/>
           </a:solidFill>
@@ -3309,7 +3367,7 @@
       <a:endParaRPr lang="en-US"/>
     </a:p>
   </c:txPr>
-  <c:externalData r:id="rId4">
+  <c:externalData r:id="rId3">
     <c:autoUpdate val="0"/>
   </c:externalData>
 </c:chartSpace>
@@ -7526,7 +7584,7 @@
           <a:p>
             <a:fld id="{63B88020-B7BD-4EF3-8055-6956E3859729}" type="datetimeFigureOut">
               <a:rPr lang="en-US" smtClean="0"/>
-              <a:t>3/26/2026</a:t>
+              <a:t>4/8/2026</a:t>
             </a:fld>
             <a:endParaRPr lang="en-US"/>
           </a:p>
@@ -7734,7 +7792,7 @@
           <a:p>
             <a:fld id="{63B88020-B7BD-4EF3-8055-6956E3859729}" type="datetimeFigureOut">
               <a:rPr lang="en-US" smtClean="0"/>
-              <a:t>3/26/2026</a:t>
+              <a:t>4/8/2026</a:t>
             </a:fld>
             <a:endParaRPr lang="en-US"/>
           </a:p>
@@ -7943,7 +8001,7 @@
           <a:p>
             <a:fld id="{63B88020-B7BD-4EF3-8055-6956E3859729}" type="datetimeFigureOut">
               <a:rPr lang="en-US" smtClean="0"/>
-              <a:t>3/26/2026</a:t>
+              <a:t>4/8/2026</a:t>
             </a:fld>
             <a:endParaRPr lang="en-US"/>
           </a:p>
@@ -8258,7 +8316,7 @@
           <a:p>
             <a:fld id="{63B88020-B7BD-4EF3-8055-6956E3859729}" type="datetimeFigureOut">
               <a:rPr lang="en-US" smtClean="0"/>
-              <a:t>3/26/2026</a:t>
+              <a:t>4/8/2026</a:t>
             </a:fld>
             <a:endParaRPr lang="en-US"/>
           </a:p>
@@ -8564,7 +8622,7 @@
           <a:p>
             <a:fld id="{63B88020-B7BD-4EF3-8055-6956E3859729}" type="datetimeFigureOut">
               <a:rPr lang="en-US" smtClean="0"/>
-              <a:t>3/26/2026</a:t>
+              <a:t>4/8/2026</a:t>
             </a:fld>
             <a:endParaRPr lang="en-US"/>
           </a:p>
@@ -9012,7 +9070,7 @@
           <a:p>
             <a:fld id="{63B88020-B7BD-4EF3-8055-6956E3859729}" type="datetimeFigureOut">
               <a:rPr lang="en-US" smtClean="0"/>
-              <a:t>3/26/2026</a:t>
+              <a:t>4/8/2026</a:t>
             </a:fld>
             <a:endParaRPr lang="en-US"/>
           </a:p>
@@ -9194,7 +9252,7 @@
           <a:p>
             <a:fld id="{63B88020-B7BD-4EF3-8055-6956E3859729}" type="datetimeFigureOut">
               <a:rPr lang="en-US" smtClean="0"/>
-              <a:t>3/26/2026</a:t>
+              <a:t>4/8/2026</a:t>
             </a:fld>
             <a:endParaRPr lang="en-US"/>
           </a:p>
@@ -9343,7 +9401,7 @@
           <a:p>
             <a:fld id="{63B88020-B7BD-4EF3-8055-6956E3859729}" type="datetimeFigureOut">
               <a:rPr lang="en-US" smtClean="0"/>
-              <a:t>3/26/2026</a:t>
+              <a:t>4/8/2026</a:t>
             </a:fld>
             <a:endParaRPr lang="en-US"/>
           </a:p>
@@ -9691,7 +9749,7 @@
           <a:p>
             <a:fld id="{63B88020-B7BD-4EF3-8055-6956E3859729}" type="datetimeFigureOut">
               <a:rPr lang="en-US" smtClean="0"/>
-              <a:t>3/26/2026</a:t>
+              <a:t>4/8/2026</a:t>
             </a:fld>
             <a:endParaRPr lang="en-US"/>
           </a:p>
@@ -10019,7 +10077,7 @@
           <a:p>
             <a:fld id="{63B88020-B7BD-4EF3-8055-6956E3859729}" type="datetimeFigureOut">
               <a:rPr lang="en-US" smtClean="0"/>
-              <a:t>3/26/2026</a:t>
+              <a:t>4/8/2026</a:t>
             </a:fld>
             <a:endParaRPr lang="en-US"/>
           </a:p>
@@ -10297,7 +10355,7 @@
           <a:p>
             <a:fld id="{63B88020-B7BD-4EF3-8055-6956E3859729}" type="datetimeFigureOut">
               <a:rPr lang="en-US" smtClean="0"/>
-              <a:t>3/26/2026</a:t>
+              <a:t>4/8/2026</a:t>
             </a:fld>
             <a:endParaRPr lang="en-US"/>
           </a:p>
@@ -11047,7 +11105,7 @@
           <a:lstStyle/>
           <a:p>
             <a:r>
-              <a:rPr lang="en-US" sz="4100" dirty="0"/>
+              <a:rPr lang="en-US"/>
               <a:t>Trends in Prevalence of Polycystic Kidney Disease in the Military Health System, by Age</a:t>
             </a:r>
           </a:p>
@@ -11055,7 +11113,7 @@
       </p:sp>
       <p:graphicFrame>
         <p:nvGraphicFramePr>
-          <p:cNvPr id="5" name="Chart 4">
+          <p:cNvPr id="6" name="Chart 5">
             <a:extLst>
               <a:ext uri="{FF2B5EF4-FFF2-40B4-BE49-F238E27FC236}">
                 <a16:creationId xmlns:a16="http://schemas.microsoft.com/office/drawing/2014/main" id="{E03099AA-6A35-4F01-ACED-FAEF261E3EEB}"/>
@@ -11068,7 +11126,7 @@
           <p:nvPr>
             <p:extLst>
               <p:ext uri="{D42A27DB-BD31-4B8C-83A1-F6EECF244321}">
-                <p14:modId xmlns:p14="http://schemas.microsoft.com/office/powerpoint/2010/main" val="1970676532"/>
+                <p14:modId xmlns:p14="http://schemas.microsoft.com/office/powerpoint/2010/main" val="3736036778"/>
               </p:ext>
             </p:extLst>
           </p:nvPr>
@@ -11132,7 +11190,7 @@
         <p:spPr>
           <a:xfrm>
             <a:off x="838200" y="365125"/>
-            <a:ext cx="11172290" cy="1325563"/>
+            <a:ext cx="10515600" cy="1325563"/>
           </a:xfrm>
         </p:spPr>
         <p:txBody>
@@ -11142,7 +11200,7 @@
           <a:lstStyle/>
           <a:p>
             <a:r>
-              <a:rPr lang="en-US" dirty="0"/>
+              <a:rPr lang="en-US" sz="4100"/>
               <a:t>Trends in Prevalence of Polycystic Kidney Disease in the Military Health System by Sex, Crude</a:t>
             </a:r>
           </a:p>
@@ -11150,7 +11208,7 @@
       </p:sp>
       <p:graphicFrame>
         <p:nvGraphicFramePr>
-          <p:cNvPr id="4" name="Chart 3">
+          <p:cNvPr id="6" name="Chart 5">
             <a:extLst>
               <a:ext uri="{FF2B5EF4-FFF2-40B4-BE49-F238E27FC236}">
                 <a16:creationId xmlns:a16="http://schemas.microsoft.com/office/drawing/2014/main" id="{F78E5499-0677-4C1D-8DAA-61464B5FA576}"/>
@@ -11163,7 +11221,7 @@
           <p:nvPr>
             <p:extLst>
               <p:ext uri="{D42A27DB-BD31-4B8C-83A1-F6EECF244321}">
-                <p14:modId xmlns:p14="http://schemas.microsoft.com/office/powerpoint/2010/main" val="1983041798"/>
+                <p14:modId xmlns:p14="http://schemas.microsoft.com/office/powerpoint/2010/main" val="641482312"/>
               </p:ext>
             </p:extLst>
           </p:nvPr>
@@ -11227,17 +11285,17 @@
         <p:spPr>
           <a:xfrm>
             <a:off x="838200" y="365125"/>
-            <a:ext cx="10972800" cy="1325563"/>
+            <a:ext cx="10515600" cy="1325563"/>
           </a:xfrm>
         </p:spPr>
         <p:txBody>
           <a:bodyPr anchor="ctr">
-            <a:noAutofit/>
+            <a:normAutofit/>
           </a:bodyPr>
           <a:lstStyle/>
           <a:p>
             <a:r>
-              <a:rPr lang="en-US" sz="4000" dirty="0"/>
+              <a:rPr lang="en-US" sz="3700"/>
               <a:t>Trends in Prevalence of Polycystic Kidney Disease in the Military Health System by Sex, Age Standardized</a:t>
             </a:r>
           </a:p>
@@ -11245,7 +11303,7 @@
       </p:sp>
       <p:graphicFrame>
         <p:nvGraphicFramePr>
-          <p:cNvPr id="7" name="Chart 6">
+          <p:cNvPr id="4" name="Chart 3">
             <a:extLst>
               <a:ext uri="{FF2B5EF4-FFF2-40B4-BE49-F238E27FC236}">
                 <a16:creationId xmlns:a16="http://schemas.microsoft.com/office/drawing/2014/main" id="{A4248078-D1C0-4C11-9BFB-DB421BD54C9B}"/>
@@ -11258,7 +11316,7 @@
           <p:nvPr>
             <p:extLst>
               <p:ext uri="{D42A27DB-BD31-4B8C-83A1-F6EECF244321}">
-                <p14:modId xmlns:p14="http://schemas.microsoft.com/office/powerpoint/2010/main" val="452000460"/>
+                <p14:modId xmlns:p14="http://schemas.microsoft.com/office/powerpoint/2010/main" val="3278333367"/>
               </p:ext>
             </p:extLst>
           </p:nvPr>
@@ -11340,7 +11398,7 @@
       </p:sp>
       <p:graphicFrame>
         <p:nvGraphicFramePr>
-          <p:cNvPr id="6" name="Chart 5">
+          <p:cNvPr id="4" name="Chart 3">
             <a:extLst>
               <a:ext uri="{FF2B5EF4-FFF2-40B4-BE49-F238E27FC236}">
                 <a16:creationId xmlns:a16="http://schemas.microsoft.com/office/drawing/2014/main" id="{95960FA6-7609-4ECF-AF29-DAC38522074A}"/>
@@ -11353,7 +11411,7 @@
           <p:nvPr>
             <p:extLst>
               <p:ext uri="{D42A27DB-BD31-4B8C-83A1-F6EECF244321}">
-                <p14:modId xmlns:p14="http://schemas.microsoft.com/office/powerpoint/2010/main" val="1161175626"/>
+                <p14:modId xmlns:p14="http://schemas.microsoft.com/office/powerpoint/2010/main" val="2742587136"/>
               </p:ext>
             </p:extLst>
           </p:nvPr>
@@ -11435,7 +11493,7 @@
       </p:sp>
       <p:graphicFrame>
         <p:nvGraphicFramePr>
-          <p:cNvPr id="5" name="Chart 4">
+          <p:cNvPr id="4" name="Chart 3">
             <a:extLst>
               <a:ext uri="{FF2B5EF4-FFF2-40B4-BE49-F238E27FC236}">
                 <a16:creationId xmlns:a16="http://schemas.microsoft.com/office/drawing/2014/main" id="{20F4EC1C-7FA5-4C86-AFC0-D77F9FC25E7A}"/>
@@ -11448,7 +11506,7 @@
           <p:nvPr>
             <p:extLst>
               <p:ext uri="{D42A27DB-BD31-4B8C-83A1-F6EECF244321}">
-                <p14:modId xmlns:p14="http://schemas.microsoft.com/office/powerpoint/2010/main" val="124914545"/>
+                <p14:modId xmlns:p14="http://schemas.microsoft.com/office/powerpoint/2010/main" val="4001555181"/>
               </p:ext>
             </p:extLst>
           </p:nvPr>
@@ -12327,562 +12385,4 @@
     </a:bgFillStyleLst>
   </a:fmtScheme>
 </a:themeOverride>
-</file>
-
-<file path=ppt/theme/themeOverride3.xml><?xml version="1.0" encoding="utf-8"?>
-<a:themeOverride xmlns:a="http://schemas.openxmlformats.org/drawingml/2006/main">
-  <a:clrScheme name="Office">
-    <a:dk1>
-      <a:sysClr val="windowText" lastClr="000000"/>
-    </a:dk1>
-    <a:lt1>
-      <a:sysClr val="window" lastClr="FFFFFF"/>
-    </a:lt1>
-    <a:dk2>
-      <a:srgbClr val="1F497D"/>
-    </a:dk2>
-    <a:lt2>
-      <a:srgbClr val="EEECE1"/>
-    </a:lt2>
-    <a:accent1>
-      <a:srgbClr val="4F81BD"/>
-    </a:accent1>
-    <a:accent2>
-      <a:srgbClr val="C0504D"/>
-    </a:accent2>
-    <a:accent3>
-      <a:srgbClr val="9BBB59"/>
-    </a:accent3>
-    <a:accent4>
-      <a:srgbClr val="8064A2"/>
-    </a:accent4>
-    <a:accent5>
-      <a:srgbClr val="4BACC6"/>
-    </a:accent5>
-    <a:accent6>
-      <a:srgbClr val="F79646"/>
-    </a:accent6>
-    <a:hlink>
-      <a:srgbClr val="0000FF"/>
-    </a:hlink>
-    <a:folHlink>
-      <a:srgbClr val="800080"/>
-    </a:folHlink>
-  </a:clrScheme>
-  <a:fontScheme name="Office">
-    <a:majorFont>
-      <a:latin typeface="Cambria"/>
-      <a:ea typeface=""/>
-      <a:cs typeface=""/>
-      <a:font script="Jpan" typeface="ＭＳ Ｐゴシック"/>
-      <a:font script="Hang" typeface="맑은 고딕"/>
-      <a:font script="Hans" typeface="宋体"/>
-      <a:font script="Hant" typeface="新細明體"/>
-      <a:font script="Arab" typeface="Times New Roman"/>
-      <a:font script="Hebr" typeface="Times New Roman"/>
-      <a:font script="Thai" typeface="Tahoma"/>
-      <a:font script="Ethi" typeface="Nyala"/>
-      <a:font script="Beng" typeface="Vrinda"/>
-      <a:font script="Gujr" typeface="Shruti"/>
-      <a:font script="Khmr" typeface="MoolBoran"/>
-      <a:font script="Knda" typeface="Tunga"/>
-      <a:font script="Guru" typeface="Raavi"/>
-      <a:font script="Cans" typeface="Euphemia"/>
-      <a:font script="Cher" typeface="Plantagenet Cherokee"/>
-      <a:font script="Yiii" typeface="Microsoft Yi Baiti"/>
-      <a:font script="Tibt" typeface="Microsoft Himalaya"/>
-      <a:font script="Thaa" typeface="MV Boli"/>
-      <a:font script="Deva" typeface="Mangal"/>
-      <a:font script="Telu" typeface="Gautami"/>
-      <a:font script="Taml" typeface="Latha"/>
-      <a:font script="Syrc" typeface="Estrangelo Edessa"/>
-      <a:font script="Orya" typeface="Kalinga"/>
-      <a:font script="Mlym" typeface="Kartika"/>
-      <a:font script="Laoo" typeface="DokChampa"/>
-      <a:font script="Sinh" typeface="Iskoola Pota"/>
-      <a:font script="Mong" typeface="Mongolian Baiti"/>
-      <a:font script="Viet" typeface="Times New Roman"/>
-      <a:font script="Uigh" typeface="Microsoft Uighur"/>
-    </a:majorFont>
-    <a:minorFont>
-      <a:latin typeface="Calibri"/>
-      <a:ea typeface=""/>
-      <a:cs typeface=""/>
-      <a:font script="Jpan" typeface="ＭＳ Ｐゴシック"/>
-      <a:font script="Hang" typeface="맑은 고딕"/>
-      <a:font script="Hans" typeface="宋体"/>
-      <a:font script="Hant" typeface="新細明體"/>
-      <a:font script="Arab" typeface="Arial"/>
-      <a:font script="Hebr" typeface="Arial"/>
-      <a:font script="Thai" typeface="Tahoma"/>
-      <a:font script="Ethi" typeface="Nyala"/>
-      <a:font script="Beng" typeface="Vrinda"/>
-      <a:font script="Gujr" typeface="Shruti"/>
-      <a:font script="Khmr" typeface="DaunPenh"/>
-      <a:font script="Knda" typeface="Tunga"/>
-      <a:font script="Guru" typeface="Raavi"/>
-      <a:font script="Cans" typeface="Euphemia"/>
-      <a:font script="Cher" typeface="Plantagenet Cherokee"/>
-      <a:font script="Yiii" typeface="Microsoft Yi Baiti"/>
-      <a:font script="Tibt" typeface="Microsoft Himalaya"/>
-      <a:font script="Thaa" typeface="MV Boli"/>
-      <a:font script="Deva" typeface="Mangal"/>
-      <a:font script="Telu" typeface="Gautami"/>
-      <a:font script="Taml" typeface="Latha"/>
-      <a:font script="Syrc" typeface="Estrangelo Edessa"/>
-      <a:font script="Orya" typeface="Kalinga"/>
-      <a:font script="Mlym" typeface="Kartika"/>
-      <a:font script="Laoo" typeface="DokChampa"/>
-      <a:font script="Sinh" typeface="Iskoola Pota"/>
-      <a:font script="Mong" typeface="Mongolian Baiti"/>
-      <a:font script="Viet" typeface="Arial"/>
-      <a:font script="Uigh" typeface="Microsoft Uighur"/>
-    </a:minorFont>
-  </a:fontScheme>
-  <a:fmtScheme name="Office">
-    <a:fillStyleLst>
-      <a:solidFill>
-        <a:schemeClr val="phClr"/>
-      </a:solidFill>
-      <a:gradFill rotWithShape="1">
-        <a:gsLst>
-          <a:gs pos="0">
-            <a:schemeClr val="phClr">
-              <a:tint val="50000"/>
-              <a:satMod val="300000"/>
-            </a:schemeClr>
-          </a:gs>
-          <a:gs pos="35000">
-            <a:schemeClr val="phClr">
-              <a:tint val="37000"/>
-              <a:satMod val="300000"/>
-            </a:schemeClr>
-          </a:gs>
-          <a:gs pos="100000">
-            <a:schemeClr val="phClr">
-              <a:tint val="15000"/>
-              <a:satMod val="350000"/>
-            </a:schemeClr>
-          </a:gs>
-        </a:gsLst>
-        <a:lin ang="16200000" scaled="1"/>
-      </a:gradFill>
-      <a:gradFill rotWithShape="1">
-        <a:gsLst>
-          <a:gs pos="0">
-            <a:schemeClr val="phClr">
-              <a:shade val="51000"/>
-              <a:satMod val="130000"/>
-            </a:schemeClr>
-          </a:gs>
-          <a:gs pos="80000">
-            <a:schemeClr val="phClr">
-              <a:shade val="93000"/>
-              <a:satMod val="130000"/>
-            </a:schemeClr>
-          </a:gs>
-          <a:gs pos="100000">
-            <a:schemeClr val="phClr">
-              <a:shade val="94000"/>
-              <a:satMod val="135000"/>
-            </a:schemeClr>
-          </a:gs>
-        </a:gsLst>
-        <a:lin ang="16200000" scaled="0"/>
-      </a:gradFill>
-    </a:fillStyleLst>
-    <a:lnStyleLst>
-      <a:ln w="9525" cap="flat" cmpd="sng" algn="ctr">
-        <a:solidFill>
-          <a:schemeClr val="phClr">
-            <a:shade val="95000"/>
-            <a:satMod val="105000"/>
-          </a:schemeClr>
-        </a:solidFill>
-        <a:prstDash val="solid"/>
-      </a:ln>
-      <a:ln w="25400" cap="flat" cmpd="sng" algn="ctr">
-        <a:solidFill>
-          <a:schemeClr val="phClr"/>
-        </a:solidFill>
-        <a:prstDash val="solid"/>
-      </a:ln>
-      <a:ln w="38100" cap="flat" cmpd="sng" algn="ctr">
-        <a:solidFill>
-          <a:schemeClr val="phClr"/>
-        </a:solidFill>
-        <a:prstDash val="solid"/>
-      </a:ln>
-    </a:lnStyleLst>
-    <a:effectStyleLst>
-      <a:effectStyle>
-        <a:effectLst>
-          <a:outerShdw blurRad="40000" dist="20000" dir="5400000" rotWithShape="0">
-            <a:srgbClr val="000000">
-              <a:alpha val="38000"/>
-            </a:srgbClr>
-          </a:outerShdw>
-        </a:effectLst>
-      </a:effectStyle>
-      <a:effectStyle>
-        <a:effectLst>
-          <a:outerShdw blurRad="40000" dist="23000" dir="5400000" rotWithShape="0">
-            <a:srgbClr val="000000">
-              <a:alpha val="35000"/>
-            </a:srgbClr>
-          </a:outerShdw>
-        </a:effectLst>
-      </a:effectStyle>
-      <a:effectStyle>
-        <a:effectLst>
-          <a:outerShdw blurRad="40000" dist="23000" dir="5400000" rotWithShape="0">
-            <a:srgbClr val="000000">
-              <a:alpha val="35000"/>
-            </a:srgbClr>
-          </a:outerShdw>
-        </a:effectLst>
-        <a:scene3d>
-          <a:camera prst="orthographicFront">
-            <a:rot lat="0" lon="0" rev="0"/>
-          </a:camera>
-          <a:lightRig rig="threePt" dir="t">
-            <a:rot lat="0" lon="0" rev="1200000"/>
-          </a:lightRig>
-        </a:scene3d>
-        <a:sp3d>
-          <a:bevelT w="63500" h="25400"/>
-        </a:sp3d>
-      </a:effectStyle>
-    </a:effectStyleLst>
-    <a:bgFillStyleLst>
-      <a:solidFill>
-        <a:schemeClr val="phClr"/>
-      </a:solidFill>
-      <a:gradFill rotWithShape="1">
-        <a:gsLst>
-          <a:gs pos="0">
-            <a:schemeClr val="phClr">
-              <a:tint val="40000"/>
-              <a:satMod val="350000"/>
-            </a:schemeClr>
-          </a:gs>
-          <a:gs pos="40000">
-            <a:schemeClr val="phClr">
-              <a:tint val="45000"/>
-              <a:shade val="99000"/>
-              <a:satMod val="350000"/>
-            </a:schemeClr>
-          </a:gs>
-          <a:gs pos="100000">
-            <a:schemeClr val="phClr">
-              <a:shade val="20000"/>
-              <a:satMod val="255000"/>
-            </a:schemeClr>
-          </a:gs>
-        </a:gsLst>
-        <a:path path="circle">
-          <a:fillToRect l="50000" t="-80000" r="50000" b="180000"/>
-        </a:path>
-      </a:gradFill>
-      <a:gradFill rotWithShape="1">
-        <a:gsLst>
-          <a:gs pos="0">
-            <a:schemeClr val="phClr">
-              <a:tint val="80000"/>
-              <a:satMod val="300000"/>
-            </a:schemeClr>
-          </a:gs>
-          <a:gs pos="100000">
-            <a:schemeClr val="phClr">
-              <a:shade val="30000"/>
-              <a:satMod val="200000"/>
-            </a:schemeClr>
-          </a:gs>
-        </a:gsLst>
-        <a:path path="circle">
-          <a:fillToRect l="50000" t="50000" r="50000" b="50000"/>
-        </a:path>
-      </a:gradFill>
-    </a:bgFillStyleLst>
-  </a:fmtScheme>
-</a:themeOverride>
-</file>
-
-<file path=ppt/theme/themeOverride4.xml><?xml version="1.0" encoding="utf-8"?>
-<a:themeOverride xmlns:a="http://schemas.openxmlformats.org/drawingml/2006/main">
-  <a:clrScheme name="Office">
-    <a:dk1>
-      <a:sysClr val="windowText" lastClr="000000"/>
-    </a:dk1>
-    <a:lt1>
-      <a:sysClr val="window" lastClr="FFFFFF"/>
-    </a:lt1>
-    <a:dk2>
-      <a:srgbClr val="1F497D"/>
-    </a:dk2>
-    <a:lt2>
-      <a:srgbClr val="EEECE1"/>
-    </a:lt2>
-    <a:accent1>
-      <a:srgbClr val="4F81BD"/>
-    </a:accent1>
-    <a:accent2>
-      <a:srgbClr val="C0504D"/>
-    </a:accent2>
-    <a:accent3>
-      <a:srgbClr val="9BBB59"/>
-    </a:accent3>
-    <a:accent4>
-      <a:srgbClr val="8064A2"/>
-    </a:accent4>
-    <a:accent5>
-      <a:srgbClr val="4BACC6"/>
-    </a:accent5>
-    <a:accent6>
-      <a:srgbClr val="F79646"/>
-    </a:accent6>
-    <a:hlink>
-      <a:srgbClr val="0000FF"/>
-    </a:hlink>
-    <a:folHlink>
-      <a:srgbClr val="800080"/>
-    </a:folHlink>
-  </a:clrScheme>
-  <a:fontScheme name="Office">
-    <a:majorFont>
-      <a:latin typeface="Cambria"/>
-      <a:ea typeface=""/>
-      <a:cs typeface=""/>
-      <a:font script="Jpan" typeface="ＭＳ Ｐゴシック"/>
-      <a:font script="Hang" typeface="맑은 고딕"/>
-      <a:font script="Hans" typeface="宋体"/>
-      <a:font script="Hant" typeface="新細明體"/>
-      <a:font script="Arab" typeface="Times New Roman"/>
-      <a:font script="Hebr" typeface="Times New Roman"/>
-      <a:font script="Thai" typeface="Tahoma"/>
-      <a:font script="Ethi" typeface="Nyala"/>
-      <a:font script="Beng" typeface="Vrinda"/>
-      <a:font script="Gujr" typeface="Shruti"/>
-      <a:font script="Khmr" typeface="MoolBoran"/>
-      <a:font script="Knda" typeface="Tunga"/>
-      <a:font script="Guru" typeface="Raavi"/>
-      <a:font script="Cans" typeface="Euphemia"/>
-      <a:font script="Cher" typeface="Plantagenet Cherokee"/>
-      <a:font script="Yiii" typeface="Microsoft Yi Baiti"/>
-      <a:font script="Tibt" typeface="Microsoft Himalaya"/>
-      <a:font script="Thaa" typeface="MV Boli"/>
-      <a:font script="Deva" typeface="Mangal"/>
-      <a:font script="Telu" typeface="Gautami"/>
-      <a:font script="Taml" typeface="Latha"/>
-      <a:font script="Syrc" typeface="Estrangelo Edessa"/>
-      <a:font script="Orya" typeface="Kalinga"/>
-      <a:font script="Mlym" typeface="Kartika"/>
-      <a:font script="Laoo" typeface="DokChampa"/>
-      <a:font script="Sinh" typeface="Iskoola Pota"/>
-      <a:font script="Mong" typeface="Mongolian Baiti"/>
-      <a:font script="Viet" typeface="Times New Roman"/>
-      <a:font script="Uigh" typeface="Microsoft Uighur"/>
-    </a:majorFont>
-    <a:minorFont>
-      <a:latin typeface="Calibri"/>
-      <a:ea typeface=""/>
-      <a:cs typeface=""/>
-      <a:font script="Jpan" typeface="ＭＳ Ｐゴシック"/>
-      <a:font script="Hang" typeface="맑은 고딕"/>
-      <a:font script="Hans" typeface="宋体"/>
-      <a:font script="Hant" typeface="新細明體"/>
-      <a:font script="Arab" typeface="Arial"/>
-      <a:font script="Hebr" typeface="Arial"/>
-      <a:font script="Thai" typeface="Tahoma"/>
-      <a:font script="Ethi" typeface="Nyala"/>
-      <a:font script="Beng" typeface="Vrinda"/>
-      <a:font script="Gujr" typeface="Shruti"/>
-      <a:font script="Khmr" typeface="DaunPenh"/>
-      <a:font script="Knda" typeface="Tunga"/>
-      <a:font script="Guru" typeface="Raavi"/>
-      <a:font script="Cans" typeface="Euphemia"/>
-      <a:font script="Cher" typeface="Plantagenet Cherokee"/>
-      <a:font script="Yiii" typeface="Microsoft Yi Baiti"/>
-      <a:font script="Tibt" typeface="Microsoft Himalaya"/>
-      <a:font script="Thaa" typeface="MV Boli"/>
-      <a:font script="Deva" typeface="Mangal"/>
-      <a:font script="Telu" typeface="Gautami"/>
-      <a:font script="Taml" typeface="Latha"/>
-      <a:font script="Syrc" typeface="Estrangelo Edessa"/>
-      <a:font script="Orya" typeface="Kalinga"/>
-      <a:font script="Mlym" typeface="Kartika"/>
-      <a:font script="Laoo" typeface="DokChampa"/>
-      <a:font script="Sinh" typeface="Iskoola Pota"/>
-      <a:font script="Mong" typeface="Mongolian Baiti"/>
-      <a:font script="Viet" typeface="Arial"/>
-      <a:font script="Uigh" typeface="Microsoft Uighur"/>
-    </a:minorFont>
-  </a:fontScheme>
-  <a:fmtScheme name="Office">
-    <a:fillStyleLst>
-      <a:solidFill>
-        <a:schemeClr val="phClr"/>
-      </a:solidFill>
-      <a:gradFill rotWithShape="1">
-        <a:gsLst>
-          <a:gs pos="0">
-            <a:schemeClr val="phClr">
-              <a:tint val="50000"/>
-              <a:satMod val="300000"/>
-            </a:schemeClr>
-          </a:gs>
-          <a:gs pos="35000">
-            <a:schemeClr val="phClr">
-              <a:tint val="37000"/>
-              <a:satMod val="300000"/>
-            </a:schemeClr>
-          </a:gs>
-          <a:gs pos="100000">
-            <a:schemeClr val="phClr">
-              <a:tint val="15000"/>
-              <a:satMod val="350000"/>
-            </a:schemeClr>
-          </a:gs>
-        </a:gsLst>
-        <a:lin ang="16200000" scaled="1"/>
-      </a:gradFill>
-      <a:gradFill rotWithShape="1">
-        <a:gsLst>
-          <a:gs pos="0">
-            <a:schemeClr val="phClr">
-              <a:shade val="51000"/>
-              <a:satMod val="130000"/>
-            </a:schemeClr>
-          </a:gs>
-          <a:gs pos="80000">
-            <a:schemeClr val="phClr">
-              <a:shade val="93000"/>
-              <a:satMod val="130000"/>
-            </a:schemeClr>
-          </a:gs>
-          <a:gs pos="100000">
-            <a:schemeClr val="phClr">
-              <a:shade val="94000"/>
-              <a:satMod val="135000"/>
-            </a:schemeClr>
-          </a:gs>
-        </a:gsLst>
-        <a:lin ang="16200000" scaled="0"/>
-      </a:gradFill>
-    </a:fillStyleLst>
-    <a:lnStyleLst>
-      <a:ln w="9525" cap="flat" cmpd="sng" algn="ctr">
-        <a:solidFill>
-          <a:schemeClr val="phClr">
-            <a:shade val="95000"/>
-            <a:satMod val="105000"/>
-          </a:schemeClr>
-        </a:solidFill>
-        <a:prstDash val="solid"/>
-      </a:ln>
-      <a:ln w="25400" cap="flat" cmpd="sng" algn="ctr">
-        <a:solidFill>
-          <a:schemeClr val="phClr"/>
-        </a:solidFill>
-        <a:prstDash val="solid"/>
-      </a:ln>
-      <a:ln w="38100" cap="flat" cmpd="sng" algn="ctr">
-        <a:solidFill>
-          <a:schemeClr val="phClr"/>
-        </a:solidFill>
-        <a:prstDash val="solid"/>
-      </a:ln>
-    </a:lnStyleLst>
-    <a:effectStyleLst>
-      <a:effectStyle>
-        <a:effectLst>
-          <a:outerShdw blurRad="40000" dist="20000" dir="5400000" rotWithShape="0">
-            <a:srgbClr val="000000">
-              <a:alpha val="38000"/>
-            </a:srgbClr>
-          </a:outerShdw>
-        </a:effectLst>
-      </a:effectStyle>
-      <a:effectStyle>
-        <a:effectLst>
-          <a:outerShdw blurRad="40000" dist="23000" dir="5400000" rotWithShape="0">
-            <a:srgbClr val="000000">
-              <a:alpha val="35000"/>
-            </a:srgbClr>
-          </a:outerShdw>
-        </a:effectLst>
-      </a:effectStyle>
-      <a:effectStyle>
-        <a:effectLst>
-          <a:outerShdw blurRad="40000" dist="23000" dir="5400000" rotWithShape="0">
-            <a:srgbClr val="000000">
-              <a:alpha val="35000"/>
-            </a:srgbClr>
-          </a:outerShdw>
-        </a:effectLst>
-        <a:scene3d>
-          <a:camera prst="orthographicFront">
-            <a:rot lat="0" lon="0" rev="0"/>
-          </a:camera>
-          <a:lightRig rig="threePt" dir="t">
-            <a:rot lat="0" lon="0" rev="1200000"/>
-          </a:lightRig>
-        </a:scene3d>
-        <a:sp3d>
-          <a:bevelT w="63500" h="25400"/>
-        </a:sp3d>
-      </a:effectStyle>
-    </a:effectStyleLst>
-    <a:bgFillStyleLst>
-      <a:solidFill>
-        <a:schemeClr val="phClr"/>
-      </a:solidFill>
-      <a:gradFill rotWithShape="1">
-        <a:gsLst>
-          <a:gs pos="0">
-            <a:schemeClr val="phClr">
-              <a:tint val="40000"/>
-              <a:satMod val="350000"/>
-            </a:schemeClr>
-          </a:gs>
-          <a:gs pos="40000">
-            <a:schemeClr val="phClr">
-              <a:tint val="45000"/>
-              <a:shade val="99000"/>
-              <a:satMod val="350000"/>
-            </a:schemeClr>
-          </a:gs>
-          <a:gs pos="100000">
-            <a:schemeClr val="phClr">
-              <a:shade val="20000"/>
-              <a:satMod val="255000"/>
-            </a:schemeClr>
-          </a:gs>
-        </a:gsLst>
-        <a:path path="circle">
-          <a:fillToRect l="50000" t="-80000" r="50000" b="180000"/>
-        </a:path>
-      </a:gradFill>
-      <a:gradFill rotWithShape="1">
-        <a:gsLst>
-          <a:gs pos="0">
-            <a:schemeClr val="phClr">
-              <a:tint val="80000"/>
-              <a:satMod val="300000"/>
-            </a:schemeClr>
-          </a:gs>
-          <a:gs pos="100000">
-            <a:schemeClr val="phClr">
-              <a:shade val="30000"/>
-              <a:satMod val="200000"/>
-            </a:schemeClr>
-          </a:gs>
-        </a:gsLst>
-        <a:path path="circle">
-          <a:fillToRect l="50000" t="50000" r="50000" b="50000"/>
-        </a:path>
-      </a:gradFill>
-    </a:bgFillStyleLst>
-  </a:fmtScheme>
-</a:themeOverride>
 </file>